--- a/MindSpot_Poster.pptx
+++ b/MindSpot_Poster.pptx
@@ -4,14 +4,14 @@
   <p:sldMasterIdLst>
     <p:sldMasterId id="2147483648" r:id="rId1"/>
   </p:sldMasterIdLst>
+  <p:sldIdLst>
+    <p:sldId id="256" r:id="rId2"/>
+  </p:sldIdLst>
   <p:notesMasterIdLst>
     <p:notesMasterId r:id="rId3"/>
   </p:notesMasterIdLst>
-  <p:sldIdLst>
-    <p:sldId id="256" r:id="rId2"/>
-  </p:sldIdLst>
-  <p:sldSz cx="25201563" cy="35999738"/>
-  <p:notesSz cx="35999738" cy="25201563"/>
+  <p:sldSz cx="25200864" cy="35999928"/>
+  <p:notesSz cx="35999928" cy="25200864"/>
   <p:defaultTextStyle>
     <a:lvl1pPr marL="0" algn="l" defTabSz="914400" rtl="0" eaLnBrk="1" latinLnBrk="0" hangingPunct="1">
       <a:defRPr sz="1800" kern="1200">
@@ -104,11 +104,6 @@
       </a:defRPr>
     </a:lvl9pPr>
   </p:defaultTextStyle>
-  <p:extLst>
-    <p:ext uri="{EFAFB233-063F-42B5-8137-9DF3F51BA10A}">
-      <p15:sldGuideLst xmlns:p15="http://schemas.microsoft.com/office/powerpoint/2012/main"/>
-    </p:ext>
-  </p:extLst>
 </p:presentation>
 </file>
 
@@ -134,16 +129,240 @@
           <a:chExt cx="0" cy="0"/>
         </a:xfrm>
       </p:grpSpPr>
+      <p:sp>
+        <p:nvSpPr>
+          <p:cNvPr id="2" name="Header Placeholder 1"/>
+          <p:cNvSpPr>
+            <a:spLocks noGrp="1"/>
+          </p:cNvSpPr>
+          <p:nvPr>
+            <p:ph type="hdr" sz="quarter"/>
+          </p:nvPr>
+        </p:nvSpPr>
+        <p:spPr>
+          <a:xfrm>
+            <a:off x="0" y="0"/>
+            <a:ext cx="2971800" cy="458788"/>
+          </a:xfrm>
+          <a:prstGeom prst="rect">
+            <a:avLst/>
+          </a:prstGeom>
+        </p:spPr>
+        <p:txBody>
+          <a:bodyPr vert="horz" lIns="91440" tIns="45720" rIns="91440" bIns="45720" rtlCol="0"/>
+          <a:lstStyle>
+            <a:lvl1pPr algn="l">
+              <a:defRPr sz="1200"/>
+            </a:lvl1pPr>
+          </a:lstStyle>
+          <a:p>
+            <a:endParaRPr lang="en-US"/>
+          </a:p>
+        </p:txBody>
+      </p:sp>
+      <p:sp>
+        <p:nvSpPr>
+          <p:cNvPr id="3" name="Date Placeholder 2"/>
+          <p:cNvSpPr>
+            <a:spLocks noGrp="1"/>
+          </p:cNvSpPr>
+          <p:nvPr>
+            <p:ph type="dt" idx="1"/>
+          </p:nvPr>
+        </p:nvSpPr>
+        <p:spPr>
+          <a:xfrm>
+            <a:off x="3884613" y="0"/>
+            <a:ext cx="2971800" cy="458788"/>
+          </a:xfrm>
+          <a:prstGeom prst="rect">
+            <a:avLst/>
+          </a:prstGeom>
+        </p:spPr>
+        <p:txBody>
+          <a:bodyPr vert="horz" lIns="91440" tIns="45720" rIns="91440" bIns="45720" rtlCol="0"/>
+          <a:lstStyle>
+            <a:lvl1pPr algn="r">
+              <a:defRPr sz="1200"/>
+            </a:lvl1pPr>
+          </a:lstStyle>
+          <a:p>
+            <a:fld id="{5282F153-3F37-0F45-9E97-73ACFA13230C}" type="datetimeFigureOut">
+              <a:rPr lang="en-US"/>
+              <a:t>7/23/19</a:t>
+            </a:fld>
+            <a:endParaRPr lang="en-US"/>
+          </a:p>
+        </p:txBody>
+      </p:sp>
+      <p:sp>
+        <p:nvSpPr>
+          <p:cNvPr id="4" name="Slide Image Placeholder 3"/>
+          <p:cNvSpPr>
+            <a:spLocks noGrp="1" noRot="1" noChangeAspect="1"/>
+          </p:cNvSpPr>
+          <p:nvPr>
+            <p:ph type="sldImg" idx="2"/>
+          </p:nvPr>
+        </p:nvSpPr>
+        <p:spPr>
+          <a:xfrm>
+            <a:off x="685800" y="1143000"/>
+            <a:ext cx="5486400" cy="3086100"/>
+          </a:xfrm>
+          <a:prstGeom prst="rect">
+            <a:avLst/>
+          </a:prstGeom>
+          <a:noFill/>
+          <a:ln w="12700">
+            <a:solidFill>
+              <a:prstClr val="black"/>
+            </a:solidFill>
+          </a:ln>
+        </p:spPr>
+        <p:txBody>
+          <a:bodyPr vert="horz" lIns="91440" tIns="45720" rIns="91440" bIns="45720" rtlCol="0" anchor="ctr"/>
+          <a:lstStyle/>
+          <a:p>
+            <a:endParaRPr lang="en-US"/>
+          </a:p>
+        </p:txBody>
+      </p:sp>
+      <p:sp>
+        <p:nvSpPr>
+          <p:cNvPr id="5" name="Notes Placeholder 4"/>
+          <p:cNvSpPr>
+            <a:spLocks noGrp="1"/>
+          </p:cNvSpPr>
+          <p:nvPr>
+            <p:ph type="body" sz="quarter" idx="3"/>
+          </p:nvPr>
+        </p:nvSpPr>
+        <p:spPr>
+          <a:xfrm>
+            <a:off x="685800" y="4400550"/>
+            <a:ext cx="5486400" cy="3600450"/>
+          </a:xfrm>
+          <a:prstGeom prst="rect">
+            <a:avLst/>
+          </a:prstGeom>
+        </p:spPr>
+        <p:txBody>
+          <a:bodyPr vert="horz" lIns="91440" tIns="45720" rIns="91440" bIns="45720" rtlCol="0"/>
+          <a:lstStyle/>
+          <a:p>
+            <a:pPr lvl="0"/>
+            <a:r>
+              <a:rPr lang="en-US"/>
+              <a:t>Click to edit Master text styles</a:t>
+            </a:r>
+          </a:p>
+          <a:p>
+            <a:pPr lvl="1"/>
+            <a:r>
+              <a:rPr lang="en-US"/>
+              <a:t>Second level</a:t>
+            </a:r>
+          </a:p>
+          <a:p>
+            <a:pPr lvl="2"/>
+            <a:r>
+              <a:rPr lang="en-US"/>
+              <a:t>Third level</a:t>
+            </a:r>
+          </a:p>
+          <a:p>
+            <a:pPr lvl="3"/>
+            <a:r>
+              <a:rPr lang="en-US"/>
+              <a:t>Fourth level</a:t>
+            </a:r>
+          </a:p>
+          <a:p>
+            <a:pPr lvl="4"/>
+            <a:r>
+              <a:rPr lang="en-US"/>
+              <a:t>Fifth level</a:t>
+            </a:r>
+          </a:p>
+        </p:txBody>
+      </p:sp>
+      <p:sp>
+        <p:nvSpPr>
+          <p:cNvPr id="6" name="Footer Placeholder 5"/>
+          <p:cNvSpPr>
+            <a:spLocks noGrp="1"/>
+          </p:cNvSpPr>
+          <p:nvPr>
+            <p:ph type="ftr" sz="quarter" idx="4"/>
+          </p:nvPr>
+        </p:nvSpPr>
+        <p:spPr>
+          <a:xfrm>
+            <a:off x="0" y="8685213"/>
+            <a:ext cx="2971800" cy="458787"/>
+          </a:xfrm>
+          <a:prstGeom prst="rect">
+            <a:avLst/>
+          </a:prstGeom>
+        </p:spPr>
+        <p:txBody>
+          <a:bodyPr vert="horz" lIns="91440" tIns="45720" rIns="91440" bIns="45720" rtlCol="0" anchor="b"/>
+          <a:lstStyle>
+            <a:lvl1pPr algn="l">
+              <a:defRPr sz="1200"/>
+            </a:lvl1pPr>
+          </a:lstStyle>
+          <a:p>
+            <a:endParaRPr lang="en-US"/>
+          </a:p>
+        </p:txBody>
+      </p:sp>
+      <p:sp>
+        <p:nvSpPr>
+          <p:cNvPr id="7" name="Slide Number Placeholder 6"/>
+          <p:cNvSpPr>
+            <a:spLocks noGrp="1"/>
+          </p:cNvSpPr>
+          <p:nvPr>
+            <p:ph type="sldNum" sz="quarter" idx="5"/>
+          </p:nvPr>
+        </p:nvSpPr>
+        <p:spPr>
+          <a:xfrm>
+            <a:off x="3884613" y="8685213"/>
+            <a:ext cx="2971800" cy="458787"/>
+          </a:xfrm>
+          <a:prstGeom prst="rect">
+            <a:avLst/>
+          </a:prstGeom>
+        </p:spPr>
+        <p:txBody>
+          <a:bodyPr vert="horz" lIns="91440" tIns="45720" rIns="91440" bIns="45720" rtlCol="0" anchor="b"/>
+          <a:lstStyle>
+            <a:lvl1pPr algn="r">
+              <a:defRPr sz="1200"/>
+            </a:lvl1pPr>
+          </a:lstStyle>
+          <a:p>
+            <a:fld id="{CE5E9CC1-C706-0F49-92D6-E571CC5EEA8F}" type="slidenum">
+              <a:rPr lang="en-US"/>
+              <a:t>‹#›</a:t>
+            </a:fld>
+            <a:endParaRPr lang="en-US"/>
+          </a:p>
+        </p:txBody>
+      </p:sp>
     </p:spTree>
     <p:extLst>
       <p:ext uri="{BB962C8B-B14F-4D97-AF65-F5344CB8AC3E}">
-        <p14:creationId xmlns:p14="http://schemas.microsoft.com/office/powerpoint/2010/main" val="4068344425"/>
+        <p14:creationId xmlns:p14="http://schemas.microsoft.com/office/powerpoint/2010/main" val="1024086991"/>
       </p:ext>
     </p:extLst>
   </p:cSld>
   <p:clrMap bg1="lt1" tx1="dk1" bg2="lt2" tx2="dk2" accent1="accent1" accent2="accent2" accent3="accent3" accent4="accent4" accent5="accent5" accent6="accent6" hlink="hlink" folHlink="folHlink"/>
   <p:notesStyle>
-    <a:lvl1pPr marL="0" algn="r" defTabSz="914400" rtl="1" eaLnBrk="1" latinLnBrk="0" hangingPunct="1">
+    <a:lvl1pPr marL="0" algn="l" defTabSz="914400" rtl="0" eaLnBrk="1" latinLnBrk="0" hangingPunct="1">
       <a:defRPr sz="1200" kern="1200">
         <a:solidFill>
           <a:schemeClr val="tx1"/>
@@ -153,7 +372,7 @@
         <a:cs typeface="+mn-cs"/>
       </a:defRPr>
     </a:lvl1pPr>
-    <a:lvl2pPr marL="457200" algn="r" defTabSz="914400" rtl="1" eaLnBrk="1" latinLnBrk="0" hangingPunct="1">
+    <a:lvl2pPr marL="457200" algn="l" defTabSz="914400" rtl="0" eaLnBrk="1" latinLnBrk="0" hangingPunct="1">
       <a:defRPr sz="1200" kern="1200">
         <a:solidFill>
           <a:schemeClr val="tx1"/>
@@ -163,7 +382,7 @@
         <a:cs typeface="+mn-cs"/>
       </a:defRPr>
     </a:lvl2pPr>
-    <a:lvl3pPr marL="914400" algn="r" defTabSz="914400" rtl="1" eaLnBrk="1" latinLnBrk="0" hangingPunct="1">
+    <a:lvl3pPr marL="914400" algn="l" defTabSz="914400" rtl="0" eaLnBrk="1" latinLnBrk="0" hangingPunct="1">
       <a:defRPr sz="1200" kern="1200">
         <a:solidFill>
           <a:schemeClr val="tx1"/>
@@ -173,7 +392,7 @@
         <a:cs typeface="+mn-cs"/>
       </a:defRPr>
     </a:lvl3pPr>
-    <a:lvl4pPr marL="1371600" algn="r" defTabSz="914400" rtl="1" eaLnBrk="1" latinLnBrk="0" hangingPunct="1">
+    <a:lvl4pPr marL="1371600" algn="l" defTabSz="914400" rtl="0" eaLnBrk="1" latinLnBrk="0" hangingPunct="1">
       <a:defRPr sz="1200" kern="1200">
         <a:solidFill>
           <a:schemeClr val="tx1"/>
@@ -183,7 +402,7 @@
         <a:cs typeface="+mn-cs"/>
       </a:defRPr>
     </a:lvl4pPr>
-    <a:lvl5pPr marL="1828800" algn="r" defTabSz="914400" rtl="1" eaLnBrk="1" latinLnBrk="0" hangingPunct="1">
+    <a:lvl5pPr marL="1828800" algn="l" defTabSz="914400" rtl="0" eaLnBrk="1" latinLnBrk="0" hangingPunct="1">
       <a:defRPr sz="1200" kern="1200">
         <a:solidFill>
           <a:schemeClr val="tx1"/>
@@ -193,7 +412,7 @@
         <a:cs typeface="+mn-cs"/>
       </a:defRPr>
     </a:lvl5pPr>
-    <a:lvl6pPr marL="2286000" algn="r" defTabSz="914400" rtl="1" eaLnBrk="1" latinLnBrk="0" hangingPunct="1">
+    <a:lvl6pPr marL="2286000" algn="l" defTabSz="914400" rtl="0" eaLnBrk="1" latinLnBrk="0" hangingPunct="1">
       <a:defRPr sz="1200" kern="1200">
         <a:solidFill>
           <a:schemeClr val="tx1"/>
@@ -203,7 +422,7 @@
         <a:cs typeface="+mn-cs"/>
       </a:defRPr>
     </a:lvl6pPr>
-    <a:lvl7pPr marL="2743200" algn="r" defTabSz="914400" rtl="1" eaLnBrk="1" latinLnBrk="0" hangingPunct="1">
+    <a:lvl7pPr marL="2743200" algn="l" defTabSz="914400" rtl="0" eaLnBrk="1" latinLnBrk="0" hangingPunct="1">
       <a:defRPr sz="1200" kern="1200">
         <a:solidFill>
           <a:schemeClr val="tx1"/>
@@ -213,7 +432,7 @@
         <a:cs typeface="+mn-cs"/>
       </a:defRPr>
     </a:lvl7pPr>
-    <a:lvl8pPr marL="3200400" algn="r" defTabSz="914400" rtl="1" eaLnBrk="1" latinLnBrk="0" hangingPunct="1">
+    <a:lvl8pPr marL="3200400" algn="l" defTabSz="914400" rtl="0" eaLnBrk="1" latinLnBrk="0" hangingPunct="1">
       <a:defRPr sz="1200" kern="1200">
         <a:solidFill>
           <a:schemeClr val="tx1"/>
@@ -223,7 +442,7 @@
         <a:cs typeface="+mn-cs"/>
       </a:defRPr>
     </a:lvl8pPr>
-    <a:lvl9pPr marL="3657600" algn="r" defTabSz="914400" rtl="1" eaLnBrk="1" latinLnBrk="0" hangingPunct="1">
+    <a:lvl9pPr marL="3657600" algn="l" defTabSz="914400" rtl="0" eaLnBrk="1" latinLnBrk="0" hangingPunct="1">
       <a:defRPr sz="1200" kern="1200">
         <a:solidFill>
           <a:schemeClr val="tx1"/>
@@ -281,6 +500,10 @@
           <a:bodyPr/>
           <a:lstStyle/>
           <a:p>
+            <a:r>
+              <a:rPr lang="en-US" dirty="0"/>
+              <a:t/>
+            </a:r>
             <a:endParaRPr lang="en-US" dirty="0"/>
           </a:p>
         </p:txBody>
@@ -354,11 +577,6 @@
 <file path=ppt/slideMasters/slideMaster1.xml><?xml version="1.0" encoding="utf-8"?>
 <p:sldMaster xmlns:a="http://schemas.openxmlformats.org/drawingml/2006/main" xmlns:r="http://schemas.openxmlformats.org/officeDocument/2006/relationships" xmlns:p="http://schemas.openxmlformats.org/presentationml/2006/main">
   <p:cSld>
-    <p:bg>
-      <p:bgRef idx="1001">
-        <a:schemeClr val="bg1"/>
-      </p:bgRef>
-    </p:bg>
     <p:spTree>
       <p:nvGrpSpPr>
         <p:cNvPr id="1" name=""/>
@@ -639,9 +857,8 @@
     <p:bg>
       <p:bgPr>
         <a:solidFill>
-          <a:srgbClr val="0B1A26"/>
+          <a:srgbClr val="1A1510"/>
         </a:solidFill>
-        <a:effectLst/>
       </p:bgPr>
     </p:bg>
     <p:spTree>
@@ -673,22 +890,15 @@
             <a:avLst/>
           </a:prstGeom>
           <a:solidFill>
-            <a:srgbClr val="061810"/>
+            <a:srgbClr val="100D08"/>
           </a:solidFill>
           <a:ln w="12700">
             <a:solidFill>
-              <a:srgbClr val="061810"/>
+              <a:srgbClr val="100D08"/>
             </a:solidFill>
             <a:prstDash val="solid"/>
           </a:ln>
         </p:spPr>
-        <p:txBody>
-          <a:bodyPr/>
-          <a:lstStyle/>
-          <a:p>
-            <a:endParaRPr lang="he-IL"/>
-          </a:p>
-        </p:txBody>
       </p:sp>
       <p:sp>
         <p:nvSpPr>
@@ -705,22 +915,15 @@
             <a:avLst/>
           </a:prstGeom>
           <a:solidFill>
-            <a:srgbClr val="2D9C6B"/>
+            <a:srgbClr val="ECC31C"/>
           </a:solidFill>
           <a:ln w="12700">
             <a:solidFill>
-              <a:srgbClr val="2D9C6B"/>
+              <a:srgbClr val="ECC31C"/>
             </a:solidFill>
             <a:prstDash val="solid"/>
           </a:ln>
         </p:spPr>
-        <p:txBody>
-          <a:bodyPr/>
-          <a:lstStyle/>
-          <a:p>
-            <a:endParaRPr lang="he-IL"/>
-          </a:p>
-        </p:txBody>
       </p:sp>
       <p:sp>
         <p:nvSpPr>
@@ -737,22 +940,15 @@
             <a:avLst/>
           </a:prstGeom>
           <a:solidFill>
-            <a:srgbClr val="2D9C6B"/>
+            <a:srgbClr val="ECC31C"/>
           </a:solidFill>
           <a:ln w="12700">
             <a:solidFill>
-              <a:srgbClr val="2D9C6B"/>
+              <a:srgbClr val="ECC31C"/>
             </a:solidFill>
             <a:prstDash val="solid"/>
           </a:ln>
         </p:spPr>
-        <p:txBody>
-          <a:bodyPr/>
-          <a:lstStyle/>
-          <a:p>
-            <a:endParaRPr lang="he-IL"/>
-          </a:p>
-        </p:txBody>
       </p:sp>
       <p:sp>
         <p:nvSpPr>
@@ -775,14 +971,15 @@
           <a:bodyPr wrap="square" lIns="50800" tIns="50800" rIns="50800" bIns="50800" rtlCol="0" anchor="t"/>
           <a:lstStyle/>
           <a:p>
-            <a:pPr marL="0" indent="0" algn="ctr" rtl="1">
+            <a:pPr rtl="1" algn="ctr" indent="0" marL="0">
               <a:buNone/>
             </a:pPr>
             <a:r>
               <a:rPr lang="en-US" sz="2800" b="1" dirty="0">
                 <a:solidFill>
-                  <a:srgbClr val="95E0BE"/>
-                </a:solidFill>
+                  <a:srgbClr val="F5EDD8"/>
+                </a:solidFill>
+                <a:latin typeface="Arial" pitchFamily="34" charset="0"/>
                 <a:ea typeface="Arial" pitchFamily="34" charset="-122"/>
                 <a:cs typeface="Arial" pitchFamily="34" charset="-120"/>
               </a:rPr>
@@ -813,14 +1010,15 @@
           <a:bodyPr wrap="square" lIns="50800" tIns="50800" rIns="50800" bIns="50800" rtlCol="0" anchor="t"/>
           <a:lstStyle/>
           <a:p>
-            <a:pPr marL="0" indent="0" algn="ctr" rtl="1">
+            <a:pPr rtl="1" algn="ctr" indent="0" marL="0">
               <a:buNone/>
             </a:pPr>
             <a:r>
               <a:rPr lang="en-US" sz="2400" dirty="0">
                 <a:solidFill>
-                  <a:srgbClr val="7FAFC0"/>
-                </a:solidFill>
+                  <a:srgbClr val="9E8E7A"/>
+                </a:solidFill>
+                <a:latin typeface="Arial" pitchFamily="34" charset="0"/>
                 <a:ea typeface="Arial" pitchFamily="34" charset="-122"/>
                 <a:cs typeface="Arial" pitchFamily="34" charset="-120"/>
               </a:rPr>
@@ -851,26 +1049,31 @@
           <a:bodyPr wrap="square" rtlCol="0" anchor="ctr"/>
           <a:lstStyle/>
           <a:p>
-            <a:pPr marL="0" indent="0" algn="ctr">
+            <a:pPr algn="ctr" indent="0" marL="0">
               <a:buNone/>
             </a:pPr>
             <a:r>
               <a:rPr lang="en-US" sz="14800" b="1" dirty="0">
                 <a:solidFill>
-                  <a:srgbClr val="FFFFFF"/>
-                </a:solidFill>
+                  <a:srgbClr val="FAF6EE"/>
+                </a:solidFill>
+                <a:latin typeface="Arial Black" pitchFamily="34" charset="0"/>
                 <a:ea typeface="Arial Black" pitchFamily="34" charset="-122"/>
-                <a:cs typeface="Assistant" pitchFamily="2" charset="-79"/>
+                <a:cs typeface="Arial Black" pitchFamily="34" charset="-120"/>
               </a:rPr>
               <a:t>Mind</a:t>
             </a:r>
+            <a:pPr algn="ctr" indent="0" marL="0">
+              <a:buNone/>
+            </a:pPr>
             <a:r>
               <a:rPr lang="en-US" sz="14800" b="1" dirty="0">
                 <a:solidFill>
-                  <a:srgbClr val="52B788"/>
-                </a:solidFill>
+                  <a:srgbClr val="D4A040"/>
+                </a:solidFill>
+                <a:latin typeface="Arial Black" pitchFamily="34" charset="0"/>
                 <a:ea typeface="Arial Black" pitchFamily="34" charset="-122"/>
-                <a:cs typeface="Assistant" pitchFamily="2" charset="-79"/>
+                <a:cs typeface="Arial Black" pitchFamily="34" charset="-120"/>
               </a:rPr>
               <a:t>Spot</a:t>
             </a:r>
@@ -899,14 +1102,15 @@
           <a:bodyPr wrap="square" lIns="50800" tIns="50800" rIns="50800" bIns="50800" rtlCol="0" anchor="t"/>
           <a:lstStyle/>
           <a:p>
-            <a:pPr marL="0" indent="0" algn="ctr" rtl="1">
+            <a:pPr rtl="1" algn="ctr" indent="0" marL="0">
               <a:buNone/>
             </a:pPr>
             <a:r>
               <a:rPr lang="en-US" sz="3800" dirty="0">
                 <a:solidFill>
-                  <a:srgbClr val="95E0BE"/>
-                </a:solidFill>
+                  <a:srgbClr val="F5EDD8"/>
+                </a:solidFill>
+                <a:latin typeface="Arial" pitchFamily="34" charset="0"/>
                 <a:ea typeface="Arial" pitchFamily="34" charset="-122"/>
                 <a:cs typeface="Arial" pitchFamily="34" charset="-120"/>
               </a:rPr>
@@ -931,22 +1135,15 @@
             <a:avLst/>
           </a:prstGeom>
           <a:solidFill>
-            <a:srgbClr val="7FAFC0"/>
+            <a:srgbClr val="9E8E7A"/>
           </a:solidFill>
           <a:ln w="12700">
             <a:solidFill>
-              <a:srgbClr val="7FAFC0"/>
+              <a:srgbClr val="9E8E7A"/>
             </a:solidFill>
             <a:prstDash val="solid"/>
           </a:ln>
         </p:spPr>
-        <p:txBody>
-          <a:bodyPr/>
-          <a:lstStyle/>
-          <a:p>
-            <a:endParaRPr lang="he-IL"/>
-          </a:p>
-        </p:txBody>
       </p:sp>
       <p:sp>
         <p:nvSpPr>
@@ -969,14 +1166,15 @@
           <a:bodyPr wrap="square" lIns="50800" tIns="50800" rIns="50800" bIns="50800" rtlCol="0" anchor="t"/>
           <a:lstStyle/>
           <a:p>
-            <a:pPr marL="0" indent="0" algn="r" rtl="1">
+            <a:pPr rtl="1" algn="r" indent="0" marL="0">
               <a:buNone/>
             </a:pPr>
             <a:r>
               <a:rPr lang="en-US" sz="3000" b="1" dirty="0">
                 <a:solidFill>
-                  <a:srgbClr val="FFFFFF"/>
-                </a:solidFill>
+                  <a:srgbClr val="FAF6EE"/>
+                </a:solidFill>
+                <a:latin typeface="Arial" pitchFamily="34" charset="0"/>
                 <a:ea typeface="Arial" pitchFamily="34" charset="-122"/>
                 <a:cs typeface="Arial" pitchFamily="34" charset="-120"/>
               </a:rPr>
@@ -1007,14 +1205,15 @@
           <a:bodyPr wrap="square" lIns="50800" tIns="50800" rIns="50800" bIns="50800" rtlCol="0" anchor="t"/>
           <a:lstStyle/>
           <a:p>
-            <a:pPr marL="0" indent="0" algn="l">
+            <a:pPr algn="l" indent="0" marL="0">
               <a:buNone/>
             </a:pPr>
             <a:r>
               <a:rPr lang="en-US" sz="3000" dirty="0">
                 <a:solidFill>
-                  <a:srgbClr val="FFFFFF"/>
-                </a:solidFill>
+                  <a:srgbClr val="FAF6EE"/>
+                </a:solidFill>
+                <a:latin typeface="Arial" pitchFamily="34" charset="0"/>
                 <a:ea typeface="Arial" pitchFamily="34" charset="-122"/>
                 <a:cs typeface="Arial" pitchFamily="34" charset="-120"/>
               </a:rPr>
@@ -1039,29 +1238,22 @@
             <a:avLst/>
           </a:prstGeom>
           <a:solidFill>
-            <a:srgbClr val="102030"/>
+            <a:srgbClr val="241D16"/>
           </a:solidFill>
           <a:ln w="15240">
             <a:solidFill>
-              <a:srgbClr val="2D9C6B"/>
+              <a:srgbClr val="ECC31C"/>
             </a:solidFill>
             <a:prstDash val="solid"/>
           </a:ln>
           <a:effectLst>
-            <a:outerShdw blurRad="101600" dist="38100" dir="8100000" algn="bl" rotWithShape="0">
+            <a:outerShdw sx="100000" sy="100000" kx="0" ky="0" algn="bl" rotWithShape="0" blurRad="101600" dist="38100" dir="8100000">
               <a:srgbClr val="000000">
                 <a:alpha val="30000"/>
               </a:srgbClr>
             </a:outerShdw>
           </a:effectLst>
         </p:spPr>
-        <p:txBody>
-          <a:bodyPr/>
-          <a:lstStyle/>
-          <a:p>
-            <a:endParaRPr lang="he-IL"/>
-          </a:p>
-        </p:txBody>
       </p:sp>
       <p:sp>
         <p:nvSpPr>
@@ -1084,14 +1276,15 @@
           <a:bodyPr wrap="square" lIns="0" tIns="0" rIns="0" bIns="0" rtlCol="0" anchor="ctr"/>
           <a:lstStyle/>
           <a:p>
-            <a:pPr marL="0" indent="0" algn="r" rtl="1">
+            <a:pPr rtl="1" algn="r" indent="0" marL="0">
               <a:buNone/>
             </a:pPr>
             <a:r>
               <a:rPr lang="en-US" sz="3800" b="1" dirty="0">
                 <a:solidFill>
-                  <a:srgbClr val="52B788"/>
-                </a:solidFill>
+                  <a:srgbClr val="D4A040"/>
+                </a:solidFill>
+                <a:latin typeface="Arial" pitchFamily="34" charset="0"/>
                 <a:ea typeface="Arial" pitchFamily="34" charset="-122"/>
                 <a:cs typeface="Arial" pitchFamily="34" charset="-120"/>
               </a:rPr>
@@ -1122,14 +1315,15 @@
           <a:bodyPr wrap="square" lIns="50800" tIns="50800" rIns="50800" bIns="50800" rtlCol="0" anchor="t"/>
           <a:lstStyle/>
           <a:p>
-            <a:pPr marL="0" indent="0" algn="r" rtl="1">
+            <a:pPr rtl="1" algn="r" indent="0" marL="0">
               <a:buNone/>
             </a:pPr>
             <a:r>
               <a:rPr lang="en-US" sz="2200" dirty="0">
                 <a:solidFill>
-                  <a:srgbClr val="FFFFFF"/>
-                </a:solidFill>
+                  <a:srgbClr val="FAF6EE"/>
+                </a:solidFill>
+                <a:latin typeface="Arial" pitchFamily="34" charset="0"/>
                 <a:ea typeface="Arial" pitchFamily="34" charset="-122"/>
                 <a:cs typeface="Arial" pitchFamily="34" charset="-120"/>
               </a:rPr>
@@ -1138,20 +1332,21 @@
             <a:endParaRPr lang="en-US" sz="2200" dirty="0"/>
           </a:p>
           <a:p>
-            <a:pPr marL="0" indent="0" algn="r" rtl="1">
+            <a:pPr rtl="1" algn="r" indent="0" marL="0">
               <a:buNone/>
             </a:pPr>
             <a:endParaRPr lang="en-US" sz="2200" dirty="0"/>
           </a:p>
           <a:p>
-            <a:pPr marL="0" indent="0" algn="r" rtl="1">
+            <a:pPr rtl="1" algn="r" indent="0" marL="0">
               <a:buNone/>
             </a:pPr>
             <a:r>
               <a:rPr lang="en-US" sz="2200" dirty="0">
                 <a:solidFill>
-                  <a:srgbClr val="FFFFFF"/>
-                </a:solidFill>
+                  <a:srgbClr val="FAF6EE"/>
+                </a:solidFill>
+                <a:latin typeface="Arial" pitchFamily="34" charset="0"/>
                 <a:ea typeface="Arial" pitchFamily="34" charset="-122"/>
                 <a:cs typeface="Arial" pitchFamily="34" charset="-120"/>
               </a:rPr>
@@ -1160,20 +1355,21 @@
             <a:endParaRPr lang="en-US" sz="2200" dirty="0"/>
           </a:p>
           <a:p>
-            <a:pPr marL="0" indent="0" algn="r" rtl="1">
+            <a:pPr rtl="1" algn="r" indent="0" marL="0">
               <a:buNone/>
             </a:pPr>
             <a:endParaRPr lang="en-US" sz="2200" dirty="0"/>
           </a:p>
           <a:p>
-            <a:pPr marL="0" indent="0" algn="r" rtl="1">
+            <a:pPr rtl="1" algn="r" indent="0" marL="0">
               <a:buNone/>
             </a:pPr>
             <a:r>
               <a:rPr lang="en-US" sz="2200" dirty="0">
                 <a:solidFill>
-                  <a:srgbClr val="FFFFFF"/>
-                </a:solidFill>
+                  <a:srgbClr val="FAF6EE"/>
+                </a:solidFill>
+                <a:latin typeface="Arial" pitchFamily="34" charset="0"/>
                 <a:ea typeface="Arial" pitchFamily="34" charset="-122"/>
                 <a:cs typeface="Arial" pitchFamily="34" charset="-120"/>
               </a:rPr>
@@ -1198,29 +1394,22 @@
             <a:avLst/>
           </a:prstGeom>
           <a:solidFill>
-            <a:srgbClr val="0D3020"/>
+            <a:srgbClr val="2A2010"/>
           </a:solidFill>
           <a:ln w="15240">
             <a:solidFill>
-              <a:srgbClr val="52B788"/>
+              <a:srgbClr val="D4A040"/>
             </a:solidFill>
             <a:prstDash val="solid"/>
           </a:ln>
           <a:effectLst>
-            <a:outerShdw blurRad="101600" dist="38100" dir="8100000" algn="bl" rotWithShape="0">
+            <a:outerShdw sx="100000" sy="100000" kx="0" ky="0" algn="bl" rotWithShape="0" blurRad="101600" dist="38100" dir="8100000">
               <a:srgbClr val="000000">
                 <a:alpha val="30000"/>
               </a:srgbClr>
             </a:outerShdw>
           </a:effectLst>
         </p:spPr>
-        <p:txBody>
-          <a:bodyPr/>
-          <a:lstStyle/>
-          <a:p>
-            <a:endParaRPr lang="he-IL"/>
-          </a:p>
-        </p:txBody>
       </p:sp>
       <p:sp>
         <p:nvSpPr>
@@ -1243,14 +1432,15 @@
           <a:bodyPr wrap="square" lIns="50800" tIns="50800" rIns="50800" bIns="50800" rtlCol="0" anchor="t"/>
           <a:lstStyle/>
           <a:p>
-            <a:pPr marL="0" indent="0" algn="ctr" rtl="1">
+            <a:pPr rtl="1" algn="ctr" indent="0" marL="0">
               <a:buNone/>
             </a:pPr>
             <a:r>
               <a:rPr lang="en-US" sz="3400" b="1" dirty="0">
                 <a:solidFill>
-                  <a:srgbClr val="52B788"/>
-                </a:solidFill>
+                  <a:srgbClr val="D4A040"/>
+                </a:solidFill>
+                <a:latin typeface="Arial" pitchFamily="34" charset="0"/>
                 <a:ea typeface="Arial" pitchFamily="34" charset="-122"/>
                 <a:cs typeface="Arial" pitchFamily="34" charset="-120"/>
               </a:rPr>
@@ -1281,14 +1471,15 @@
           <a:bodyPr wrap="square" lIns="50800" tIns="50800" rIns="50800" bIns="50800" rtlCol="0" anchor="t"/>
           <a:lstStyle/>
           <a:p>
-            <a:pPr marL="0" indent="0" algn="ctr" rtl="1">
+            <a:pPr rtl="1" algn="ctr" indent="0" marL="0">
               <a:buNone/>
             </a:pPr>
             <a:r>
               <a:rPr lang="en-US" sz="2100" dirty="0">
                 <a:solidFill>
-                  <a:srgbClr val="95E0BE"/>
-                </a:solidFill>
+                  <a:srgbClr val="F5EDD8"/>
+                </a:solidFill>
+                <a:latin typeface="Arial" pitchFamily="34" charset="0"/>
                 <a:ea typeface="Arial" pitchFamily="34" charset="-122"/>
                 <a:cs typeface="Arial" pitchFamily="34" charset="-120"/>
               </a:rPr>
@@ -1313,29 +1504,22 @@
             <a:avLst/>
           </a:prstGeom>
           <a:solidFill>
-            <a:srgbClr val="102030"/>
+            <a:srgbClr val="241D16"/>
           </a:solidFill>
           <a:ln w="15240">
             <a:solidFill>
-              <a:srgbClr val="2D9C6B"/>
+              <a:srgbClr val="ECC31C"/>
             </a:solidFill>
             <a:prstDash val="solid"/>
           </a:ln>
           <a:effectLst>
-            <a:outerShdw blurRad="101600" dist="38100" dir="8100000" algn="bl" rotWithShape="0">
+            <a:outerShdw sx="100000" sy="100000" kx="0" ky="0" algn="bl" rotWithShape="0" blurRad="101600" dist="38100" dir="8100000">
               <a:srgbClr val="000000">
                 <a:alpha val="30000"/>
               </a:srgbClr>
             </a:outerShdw>
           </a:effectLst>
         </p:spPr>
-        <p:txBody>
-          <a:bodyPr/>
-          <a:lstStyle/>
-          <a:p>
-            <a:endParaRPr lang="he-IL"/>
-          </a:p>
-        </p:txBody>
       </p:sp>
       <p:sp>
         <p:nvSpPr>
@@ -1358,14 +1542,15 @@
           <a:bodyPr wrap="square" lIns="0" tIns="0" rIns="0" bIns="0" rtlCol="0" anchor="ctr"/>
           <a:lstStyle/>
           <a:p>
-            <a:pPr marL="0" indent="0" algn="r" rtl="1">
+            <a:pPr rtl="1" algn="r" indent="0" marL="0">
               <a:buNone/>
             </a:pPr>
             <a:r>
               <a:rPr lang="en-US" sz="3800" b="1" dirty="0">
                 <a:solidFill>
-                  <a:srgbClr val="52B788"/>
-                </a:solidFill>
+                  <a:srgbClr val="D4A040"/>
+                </a:solidFill>
+                <a:latin typeface="Arial" pitchFamily="34" charset="0"/>
                 <a:ea typeface="Arial" pitchFamily="34" charset="-122"/>
                 <a:cs typeface="Arial" pitchFamily="34" charset="-120"/>
               </a:rPr>
@@ -1390,22 +1575,15 @@
             <a:avLst/>
           </a:prstGeom>
           <a:solidFill>
-            <a:srgbClr val="2D9C6B"/>
+            <a:srgbClr val="ECC31C"/>
           </a:solidFill>
           <a:ln w="12700">
             <a:solidFill>
-              <a:srgbClr val="2D9C6B"/>
+              <a:srgbClr val="ECC31C"/>
             </a:solidFill>
             <a:prstDash val="solid"/>
           </a:ln>
         </p:spPr>
-        <p:txBody>
-          <a:bodyPr/>
-          <a:lstStyle/>
-          <a:p>
-            <a:endParaRPr lang="he-IL"/>
-          </a:p>
-        </p:txBody>
       </p:sp>
       <p:sp>
         <p:nvSpPr>
@@ -1428,14 +1606,15 @@
           <a:bodyPr wrap="square" lIns="0" tIns="0" rIns="0" bIns="0" rtlCol="0" anchor="ctr"/>
           <a:lstStyle/>
           <a:p>
-            <a:pPr marL="0" indent="0" algn="ctr" rtl="1">
+            <a:pPr rtl="1" algn="ctr" indent="0" marL="0">
               <a:buNone/>
             </a:pPr>
             <a:r>
               <a:rPr lang="en-US" sz="2100" b="1" dirty="0">
                 <a:solidFill>
-                  <a:srgbClr val="FFFFFF"/>
-                </a:solidFill>
+                  <a:srgbClr val="FAF6EE"/>
+                </a:solidFill>
+                <a:latin typeface="Arial" pitchFamily="34" charset="0"/>
                 <a:ea typeface="Arial" pitchFamily="34" charset="-122"/>
                 <a:cs typeface="Arial" pitchFamily="34" charset="-120"/>
               </a:rPr>
@@ -1466,14 +1645,15 @@
           <a:bodyPr wrap="square" lIns="0" tIns="0" rIns="0" bIns="0" rtlCol="0" anchor="t"/>
           <a:lstStyle/>
           <a:p>
-            <a:pPr marL="0" indent="0" algn="r" rtl="1">
+            <a:pPr rtl="1" algn="r" indent="0" marL="0">
               <a:buNone/>
             </a:pPr>
             <a:r>
               <a:rPr lang="en-US" sz="2500" b="1" dirty="0">
                 <a:solidFill>
-                  <a:srgbClr val="FFFFFF"/>
-                </a:solidFill>
+                  <a:srgbClr val="FAF6EE"/>
+                </a:solidFill>
+                <a:latin typeface="Arial" pitchFamily="34" charset="0"/>
                 <a:ea typeface="Arial" pitchFamily="34" charset="-122"/>
                 <a:cs typeface="Arial" pitchFamily="34" charset="-120"/>
               </a:rPr>
@@ -1504,14 +1684,15 @@
           <a:bodyPr wrap="square" lIns="0" tIns="0" rIns="0" bIns="0" rtlCol="0" anchor="t"/>
           <a:lstStyle/>
           <a:p>
-            <a:pPr marL="0" indent="0" algn="r" rtl="1">
+            <a:pPr rtl="1" algn="r" indent="0" marL="0">
               <a:buNone/>
             </a:pPr>
             <a:r>
               <a:rPr lang="en-US" sz="1800" dirty="0">
                 <a:solidFill>
-                  <a:srgbClr val="7FAFC0"/>
-                </a:solidFill>
+                  <a:srgbClr val="9E8E7A"/>
+                </a:solidFill>
+                <a:latin typeface="Arial" pitchFamily="34" charset="0"/>
                 <a:ea typeface="Arial" pitchFamily="34" charset="-122"/>
                 <a:cs typeface="Arial" pitchFamily="34" charset="-120"/>
               </a:rPr>
@@ -1536,22 +1717,15 @@
             <a:avLst/>
           </a:prstGeom>
           <a:solidFill>
-            <a:srgbClr val="2D9C6B"/>
+            <a:srgbClr val="ECC31C"/>
           </a:solidFill>
           <a:ln w="12700">
             <a:solidFill>
-              <a:srgbClr val="2D9C6B"/>
+              <a:srgbClr val="ECC31C"/>
             </a:solidFill>
             <a:prstDash val="solid"/>
           </a:ln>
         </p:spPr>
-        <p:txBody>
-          <a:bodyPr/>
-          <a:lstStyle/>
-          <a:p>
-            <a:endParaRPr lang="he-IL"/>
-          </a:p>
-        </p:txBody>
       </p:sp>
       <p:sp>
         <p:nvSpPr>
@@ -1574,14 +1748,15 @@
           <a:bodyPr wrap="square" lIns="0" tIns="0" rIns="0" bIns="0" rtlCol="0" anchor="ctr"/>
           <a:lstStyle/>
           <a:p>
-            <a:pPr marL="0" indent="0" algn="ctr" rtl="1">
+            <a:pPr rtl="1" algn="ctr" indent="0" marL="0">
               <a:buNone/>
             </a:pPr>
             <a:r>
               <a:rPr lang="en-US" sz="2100" b="1" dirty="0">
                 <a:solidFill>
-                  <a:srgbClr val="FFFFFF"/>
-                </a:solidFill>
+                  <a:srgbClr val="FAF6EE"/>
+                </a:solidFill>
+                <a:latin typeface="Arial" pitchFamily="34" charset="0"/>
                 <a:ea typeface="Arial" pitchFamily="34" charset="-122"/>
                 <a:cs typeface="Arial" pitchFamily="34" charset="-120"/>
               </a:rPr>
@@ -1612,14 +1787,15 @@
           <a:bodyPr wrap="square" lIns="0" tIns="0" rIns="0" bIns="0" rtlCol="0" anchor="t"/>
           <a:lstStyle/>
           <a:p>
-            <a:pPr marL="0" indent="0" algn="r" rtl="1">
+            <a:pPr rtl="1" algn="r" indent="0" marL="0">
               <a:buNone/>
             </a:pPr>
             <a:r>
               <a:rPr lang="en-US" sz="2500" b="1" dirty="0">
                 <a:solidFill>
-                  <a:srgbClr val="FFFFFF"/>
-                </a:solidFill>
+                  <a:srgbClr val="FAF6EE"/>
+                </a:solidFill>
+                <a:latin typeface="Arial" pitchFamily="34" charset="0"/>
                 <a:ea typeface="Arial" pitchFamily="34" charset="-122"/>
                 <a:cs typeface="Arial" pitchFamily="34" charset="-120"/>
               </a:rPr>
@@ -1650,14 +1826,15 @@
           <a:bodyPr wrap="square" lIns="0" tIns="0" rIns="0" bIns="0" rtlCol="0" anchor="t"/>
           <a:lstStyle/>
           <a:p>
-            <a:pPr marL="0" indent="0" algn="r" rtl="1">
+            <a:pPr rtl="1" algn="r" indent="0" marL="0">
               <a:buNone/>
             </a:pPr>
             <a:r>
               <a:rPr lang="en-US" sz="1800" dirty="0">
                 <a:solidFill>
-                  <a:srgbClr val="7FAFC0"/>
-                </a:solidFill>
+                  <a:srgbClr val="9E8E7A"/>
+                </a:solidFill>
+                <a:latin typeface="Arial" pitchFamily="34" charset="0"/>
                 <a:ea typeface="Arial" pitchFamily="34" charset="-122"/>
                 <a:cs typeface="Arial" pitchFamily="34" charset="-120"/>
               </a:rPr>
@@ -1682,22 +1859,15 @@
             <a:avLst/>
           </a:prstGeom>
           <a:solidFill>
-            <a:srgbClr val="2D9C6B"/>
+            <a:srgbClr val="ECC31C"/>
           </a:solidFill>
           <a:ln w="12700">
             <a:solidFill>
-              <a:srgbClr val="2D9C6B"/>
+              <a:srgbClr val="ECC31C"/>
             </a:solidFill>
             <a:prstDash val="solid"/>
           </a:ln>
         </p:spPr>
-        <p:txBody>
-          <a:bodyPr/>
-          <a:lstStyle/>
-          <a:p>
-            <a:endParaRPr lang="he-IL"/>
-          </a:p>
-        </p:txBody>
       </p:sp>
       <p:sp>
         <p:nvSpPr>
@@ -1720,14 +1890,15 @@
           <a:bodyPr wrap="square" lIns="0" tIns="0" rIns="0" bIns="0" rtlCol="0" anchor="ctr"/>
           <a:lstStyle/>
           <a:p>
-            <a:pPr marL="0" indent="0" algn="ctr" rtl="1">
+            <a:pPr rtl="1" algn="ctr" indent="0" marL="0">
               <a:buNone/>
             </a:pPr>
             <a:r>
               <a:rPr lang="en-US" sz="2100" b="1" dirty="0">
                 <a:solidFill>
-                  <a:srgbClr val="FFFFFF"/>
-                </a:solidFill>
+                  <a:srgbClr val="FAF6EE"/>
+                </a:solidFill>
+                <a:latin typeface="Arial" pitchFamily="34" charset="0"/>
                 <a:ea typeface="Arial" pitchFamily="34" charset="-122"/>
                 <a:cs typeface="Arial" pitchFamily="34" charset="-120"/>
               </a:rPr>
@@ -1758,14 +1929,15 @@
           <a:bodyPr wrap="square" lIns="0" tIns="0" rIns="0" bIns="0" rtlCol="0" anchor="t"/>
           <a:lstStyle/>
           <a:p>
-            <a:pPr marL="0" indent="0" algn="r" rtl="1">
+            <a:pPr rtl="1" algn="r" indent="0" marL="0">
               <a:buNone/>
             </a:pPr>
             <a:r>
               <a:rPr lang="en-US" sz="2500" b="1" dirty="0">
                 <a:solidFill>
-                  <a:srgbClr val="FFFFFF"/>
-                </a:solidFill>
+                  <a:srgbClr val="FAF6EE"/>
+                </a:solidFill>
+                <a:latin typeface="Arial" pitchFamily="34" charset="0"/>
                 <a:ea typeface="Arial" pitchFamily="34" charset="-122"/>
                 <a:cs typeface="Arial" pitchFamily="34" charset="-120"/>
               </a:rPr>
@@ -1796,14 +1968,15 @@
           <a:bodyPr wrap="square" lIns="0" tIns="0" rIns="0" bIns="0" rtlCol="0" anchor="t"/>
           <a:lstStyle/>
           <a:p>
-            <a:pPr marL="0" indent="0" algn="r" rtl="1">
+            <a:pPr rtl="1" algn="r" indent="0" marL="0">
               <a:buNone/>
             </a:pPr>
             <a:r>
               <a:rPr lang="en-US" sz="1800" dirty="0">
                 <a:solidFill>
-                  <a:srgbClr val="7FAFC0"/>
-                </a:solidFill>
+                  <a:srgbClr val="9E8E7A"/>
+                </a:solidFill>
+                <a:latin typeface="Arial" pitchFamily="34" charset="0"/>
                 <a:ea typeface="Arial" pitchFamily="34" charset="-122"/>
                 <a:cs typeface="Arial" pitchFamily="34" charset="-120"/>
               </a:rPr>
@@ -1828,22 +2001,15 @@
             <a:avLst/>
           </a:prstGeom>
           <a:solidFill>
-            <a:srgbClr val="2D9C6B"/>
+            <a:srgbClr val="ECC31C"/>
           </a:solidFill>
           <a:ln w="12700">
             <a:solidFill>
-              <a:srgbClr val="2D9C6B"/>
+              <a:srgbClr val="ECC31C"/>
             </a:solidFill>
             <a:prstDash val="solid"/>
           </a:ln>
         </p:spPr>
-        <p:txBody>
-          <a:bodyPr/>
-          <a:lstStyle/>
-          <a:p>
-            <a:endParaRPr lang="he-IL"/>
-          </a:p>
-        </p:txBody>
       </p:sp>
       <p:sp>
         <p:nvSpPr>
@@ -1866,14 +2032,15 @@
           <a:bodyPr wrap="square" lIns="0" tIns="0" rIns="0" bIns="0" rtlCol="0" anchor="ctr"/>
           <a:lstStyle/>
           <a:p>
-            <a:pPr marL="0" indent="0" algn="ctr" rtl="1">
+            <a:pPr rtl="1" algn="ctr" indent="0" marL="0">
               <a:buNone/>
             </a:pPr>
             <a:r>
               <a:rPr lang="en-US" sz="2100" b="1" dirty="0">
                 <a:solidFill>
-                  <a:srgbClr val="FFFFFF"/>
-                </a:solidFill>
+                  <a:srgbClr val="FAF6EE"/>
+                </a:solidFill>
+                <a:latin typeface="Arial" pitchFamily="34" charset="0"/>
                 <a:ea typeface="Arial" pitchFamily="34" charset="-122"/>
                 <a:cs typeface="Arial" pitchFamily="34" charset="-120"/>
               </a:rPr>
@@ -1904,14 +2071,15 @@
           <a:bodyPr wrap="square" lIns="0" tIns="0" rIns="0" bIns="0" rtlCol="0" anchor="t"/>
           <a:lstStyle/>
           <a:p>
-            <a:pPr marL="0" indent="0" algn="r" rtl="1">
+            <a:pPr rtl="1" algn="r" indent="0" marL="0">
               <a:buNone/>
             </a:pPr>
             <a:r>
               <a:rPr lang="en-US" sz="2500" b="1" dirty="0">
                 <a:solidFill>
-                  <a:srgbClr val="FFFFFF"/>
-                </a:solidFill>
+                  <a:srgbClr val="FAF6EE"/>
+                </a:solidFill>
+                <a:latin typeface="Arial" pitchFamily="34" charset="0"/>
                 <a:ea typeface="Arial" pitchFamily="34" charset="-122"/>
                 <a:cs typeface="Arial" pitchFamily="34" charset="-120"/>
               </a:rPr>
@@ -1942,14 +2110,15 @@
           <a:bodyPr wrap="square" lIns="0" tIns="0" rIns="0" bIns="0" rtlCol="0" anchor="t"/>
           <a:lstStyle/>
           <a:p>
-            <a:pPr marL="0" indent="0" algn="r" rtl="1">
+            <a:pPr rtl="1" algn="r" indent="0" marL="0">
               <a:buNone/>
             </a:pPr>
             <a:r>
               <a:rPr lang="en-US" sz="1800" dirty="0">
                 <a:solidFill>
-                  <a:srgbClr val="7FAFC0"/>
-                </a:solidFill>
+                  <a:srgbClr val="9E8E7A"/>
+                </a:solidFill>
+                <a:latin typeface="Arial" pitchFamily="34" charset="0"/>
                 <a:ea typeface="Arial" pitchFamily="34" charset="-122"/>
                 <a:cs typeface="Arial" pitchFamily="34" charset="-120"/>
               </a:rPr>
@@ -1974,29 +2143,22 @@
             <a:avLst/>
           </a:prstGeom>
           <a:solidFill>
-            <a:srgbClr val="172840"/>
+            <a:srgbClr val="2E2519"/>
           </a:solidFill>
           <a:ln w="15240">
             <a:solidFill>
-              <a:srgbClr val="2D9C6B"/>
+              <a:srgbClr val="ECC31C"/>
             </a:solidFill>
             <a:prstDash val="solid"/>
           </a:ln>
           <a:effectLst>
-            <a:outerShdw blurRad="101600" dist="38100" dir="8100000" algn="bl" rotWithShape="0">
+            <a:outerShdw sx="100000" sy="100000" kx="0" ky="0" algn="bl" rotWithShape="0" blurRad="101600" dist="38100" dir="8100000">
               <a:srgbClr val="000000">
                 <a:alpha val="30000"/>
               </a:srgbClr>
             </a:outerShdw>
           </a:effectLst>
         </p:spPr>
-        <p:txBody>
-          <a:bodyPr/>
-          <a:lstStyle/>
-          <a:p>
-            <a:endParaRPr lang="he-IL"/>
-          </a:p>
-        </p:txBody>
       </p:sp>
       <p:sp>
         <p:nvSpPr>
@@ -2019,14 +2181,15 @@
           <a:bodyPr wrap="square" lIns="0" tIns="0" rIns="0" bIns="0" rtlCol="0" anchor="ctr"/>
           <a:lstStyle/>
           <a:p>
-            <a:pPr marL="0" indent="0" algn="r" rtl="1">
+            <a:pPr rtl="1" algn="r" indent="0" marL="0">
               <a:buNone/>
             </a:pPr>
             <a:r>
               <a:rPr lang="en-US" sz="3800" b="1" dirty="0">
                 <a:solidFill>
-                  <a:srgbClr val="52B788"/>
-                </a:solidFill>
+                  <a:srgbClr val="D4A040"/>
+                </a:solidFill>
+                <a:latin typeface="Arial" pitchFamily="34" charset="0"/>
                 <a:ea typeface="Arial" pitchFamily="34" charset="-122"/>
                 <a:cs typeface="Arial" pitchFamily="34" charset="-120"/>
               </a:rPr>
@@ -2051,29 +2214,22 @@
             <a:avLst/>
           </a:prstGeom>
           <a:solidFill>
-            <a:srgbClr val="1A5E8A"/>
+            <a:srgbClr val="3A2E18"/>
           </a:solidFill>
           <a:ln w="6350">
             <a:solidFill>
-              <a:srgbClr val="FFFFFF"/>
+              <a:srgbClr val="FAF6EE"/>
             </a:solidFill>
             <a:prstDash val="solid"/>
           </a:ln>
           <a:effectLst>
-            <a:outerShdw blurRad="101600" dist="38100" dir="8100000" algn="bl" rotWithShape="0">
+            <a:outerShdw sx="100000" sy="100000" kx="0" ky="0" algn="bl" rotWithShape="0" blurRad="101600" dist="38100" dir="8100000">
               <a:srgbClr val="000000">
                 <a:alpha val="30000"/>
               </a:srgbClr>
             </a:outerShdw>
           </a:effectLst>
         </p:spPr>
-        <p:txBody>
-          <a:bodyPr/>
-          <a:lstStyle/>
-          <a:p>
-            <a:endParaRPr lang="he-IL"/>
-          </a:p>
-        </p:txBody>
       </p:sp>
       <p:sp>
         <p:nvSpPr>
@@ -2096,14 +2252,15 @@
           <a:bodyPr wrap="square" lIns="50800" tIns="50800" rIns="50800" bIns="50800" rtlCol="0" anchor="t"/>
           <a:lstStyle/>
           <a:p>
-            <a:pPr marL="0" indent="0" algn="ctr">
+            <a:pPr algn="ctr" indent="0" marL="0">
               <a:buNone/>
             </a:pPr>
             <a:r>
               <a:rPr lang="en-US" sz="2700" b="1" dirty="0">
                 <a:solidFill>
-                  <a:srgbClr val="FFFFFF"/>
-                </a:solidFill>
+                  <a:srgbClr val="FAF6EE"/>
+                </a:solidFill>
+                <a:latin typeface="Arial" pitchFamily="34" charset="0"/>
                 <a:ea typeface="Arial" pitchFamily="34" charset="-122"/>
                 <a:cs typeface="Arial" pitchFamily="34" charset="-120"/>
               </a:rPr>
@@ -2128,22 +2285,15 @@
             <a:avLst/>
           </a:prstGeom>
           <a:solidFill>
-            <a:srgbClr val="FFFFFF"/>
+            <a:srgbClr val="FAF6EE"/>
           </a:solidFill>
           <a:ln w="12700">
             <a:solidFill>
-              <a:srgbClr val="FFFFFF"/>
+              <a:srgbClr val="FAF6EE"/>
             </a:solidFill>
             <a:prstDash val="solid"/>
           </a:ln>
         </p:spPr>
-        <p:txBody>
-          <a:bodyPr/>
-          <a:lstStyle/>
-          <a:p>
-            <a:endParaRPr lang="he-IL"/>
-          </a:p>
-        </p:txBody>
       </p:sp>
       <p:sp>
         <p:nvSpPr>
@@ -2166,14 +2316,15 @@
           <a:bodyPr wrap="square" lIns="25400" tIns="25400" rIns="25400" bIns="25400" rtlCol="0" anchor="ctr"/>
           <a:lstStyle/>
           <a:p>
-            <a:pPr marL="0" indent="0" algn="ctr" rtl="1">
+            <a:pPr rtl="1" algn="ctr" indent="0" marL="0">
               <a:buNone/>
             </a:pPr>
             <a:r>
               <a:rPr lang="en-US" sz="1900" dirty="0">
                 <a:solidFill>
-                  <a:srgbClr val="FFFFFF"/>
-                </a:solidFill>
+                  <a:srgbClr val="FAF6EE"/>
+                </a:solidFill>
+                <a:latin typeface="Arial" pitchFamily="34" charset="0"/>
                 <a:ea typeface="Arial" pitchFamily="34" charset="-122"/>
                 <a:cs typeface="Arial" pitchFamily="34" charset="-120"/>
               </a:rPr>
@@ -2204,14 +2355,15 @@
           <a:bodyPr wrap="square" lIns="25400" tIns="25400" rIns="25400" bIns="25400" rtlCol="0" anchor="ctr"/>
           <a:lstStyle/>
           <a:p>
-            <a:pPr marL="0" indent="0" algn="ctr" rtl="1">
+            <a:pPr rtl="1" algn="ctr" indent="0" marL="0">
               <a:buNone/>
             </a:pPr>
             <a:r>
               <a:rPr lang="en-US" sz="1900" dirty="0">
                 <a:solidFill>
-                  <a:srgbClr val="FFFFFF"/>
-                </a:solidFill>
+                  <a:srgbClr val="FAF6EE"/>
+                </a:solidFill>
+                <a:latin typeface="Arial" pitchFamily="34" charset="0"/>
                 <a:ea typeface="Arial" pitchFamily="34" charset="-122"/>
                 <a:cs typeface="Arial" pitchFamily="34" charset="-120"/>
               </a:rPr>
@@ -2242,14 +2394,15 @@
           <a:bodyPr wrap="square" lIns="25400" tIns="25400" rIns="25400" bIns="25400" rtlCol="0" anchor="ctr"/>
           <a:lstStyle/>
           <a:p>
-            <a:pPr marL="0" indent="0" algn="ctr" rtl="1">
+            <a:pPr rtl="1" algn="ctr" indent="0" marL="0">
               <a:buNone/>
             </a:pPr>
             <a:r>
               <a:rPr lang="en-US" sz="1900" dirty="0">
                 <a:solidFill>
-                  <a:srgbClr val="FFFFFF"/>
-                </a:solidFill>
+                  <a:srgbClr val="FAF6EE"/>
+                </a:solidFill>
+                <a:latin typeface="Arial" pitchFamily="34" charset="0"/>
                 <a:ea typeface="Arial" pitchFamily="34" charset="-122"/>
                 <a:cs typeface="Arial" pitchFamily="34" charset="-120"/>
               </a:rPr>
@@ -2280,14 +2433,15 @@
           <a:bodyPr wrap="square" lIns="25400" tIns="25400" rIns="25400" bIns="25400" rtlCol="0" anchor="ctr"/>
           <a:lstStyle/>
           <a:p>
-            <a:pPr marL="0" indent="0" algn="ctr" rtl="1">
+            <a:pPr rtl="1" algn="ctr" indent="0" marL="0">
               <a:buNone/>
             </a:pPr>
             <a:r>
               <a:rPr lang="en-US" sz="1900" dirty="0">
                 <a:solidFill>
-                  <a:srgbClr val="FFFFFF"/>
-                </a:solidFill>
+                  <a:srgbClr val="FAF6EE"/>
+                </a:solidFill>
+                <a:latin typeface="Arial" pitchFamily="34" charset="0"/>
                 <a:ea typeface="Arial" pitchFamily="34" charset="-122"/>
                 <a:cs typeface="Arial" pitchFamily="34" charset="-120"/>
               </a:rPr>
@@ -2314,18 +2468,11 @@
           <a:noFill/>
           <a:ln w="38100">
             <a:solidFill>
-              <a:srgbClr val="95E0BE"/>
+              <a:srgbClr val="F5EDD8"/>
             </a:solidFill>
             <a:prstDash val="solid"/>
           </a:ln>
         </p:spPr>
-        <p:txBody>
-          <a:bodyPr/>
-          <a:lstStyle/>
-          <a:p>
-            <a:endParaRPr lang="he-IL"/>
-          </a:p>
-        </p:txBody>
       </p:sp>
       <p:sp>
         <p:nvSpPr>
@@ -2342,29 +2489,22 @@
             <a:avLst/>
           </a:prstGeom>
           <a:solidFill>
-            <a:srgbClr val="1A6840"/>
+            <a:srgbClr val="2E3820"/>
           </a:solidFill>
           <a:ln w="6350">
             <a:solidFill>
-              <a:srgbClr val="FFFFFF"/>
+              <a:srgbClr val="FAF6EE"/>
             </a:solidFill>
             <a:prstDash val="solid"/>
           </a:ln>
           <a:effectLst>
-            <a:outerShdw blurRad="101600" dist="38100" dir="8100000" algn="bl" rotWithShape="0">
+            <a:outerShdw sx="100000" sy="100000" kx="0" ky="0" algn="bl" rotWithShape="0" blurRad="101600" dist="38100" dir="8100000">
               <a:srgbClr val="000000">
                 <a:alpha val="30000"/>
               </a:srgbClr>
             </a:outerShdw>
           </a:effectLst>
         </p:spPr>
-        <p:txBody>
-          <a:bodyPr/>
-          <a:lstStyle/>
-          <a:p>
-            <a:endParaRPr lang="he-IL"/>
-          </a:p>
-        </p:txBody>
       </p:sp>
       <p:sp>
         <p:nvSpPr>
@@ -2387,14 +2527,15 @@
           <a:bodyPr wrap="square" lIns="50800" tIns="50800" rIns="50800" bIns="50800" rtlCol="0" anchor="t"/>
           <a:lstStyle/>
           <a:p>
-            <a:pPr marL="0" indent="0" algn="ctr">
+            <a:pPr algn="ctr" indent="0" marL="0">
               <a:buNone/>
             </a:pPr>
             <a:r>
               <a:rPr lang="en-US" sz="2700" b="1" dirty="0">
                 <a:solidFill>
-                  <a:srgbClr val="FFFFFF"/>
-                </a:solidFill>
+                  <a:srgbClr val="FAF6EE"/>
+                </a:solidFill>
+                <a:latin typeface="Arial" pitchFamily="34" charset="0"/>
                 <a:ea typeface="Arial" pitchFamily="34" charset="-122"/>
                 <a:cs typeface="Arial" pitchFamily="34" charset="-120"/>
               </a:rPr>
@@ -2419,22 +2560,15 @@
             <a:avLst/>
           </a:prstGeom>
           <a:solidFill>
-            <a:srgbClr val="FFFFFF"/>
+            <a:srgbClr val="FAF6EE"/>
           </a:solidFill>
           <a:ln w="12700">
             <a:solidFill>
-              <a:srgbClr val="FFFFFF"/>
+              <a:srgbClr val="FAF6EE"/>
             </a:solidFill>
             <a:prstDash val="solid"/>
           </a:ln>
         </p:spPr>
-        <p:txBody>
-          <a:bodyPr/>
-          <a:lstStyle/>
-          <a:p>
-            <a:endParaRPr lang="he-IL"/>
-          </a:p>
-        </p:txBody>
       </p:sp>
       <p:sp>
         <p:nvSpPr>
@@ -2457,14 +2591,15 @@
           <a:bodyPr wrap="square" lIns="25400" tIns="25400" rIns="25400" bIns="25400" rtlCol="0" anchor="ctr"/>
           <a:lstStyle/>
           <a:p>
-            <a:pPr marL="0" indent="0" algn="ctr" rtl="1">
+            <a:pPr rtl="1" algn="ctr" indent="0" marL="0">
               <a:buNone/>
             </a:pPr>
             <a:r>
               <a:rPr lang="en-US" sz="1900" dirty="0">
                 <a:solidFill>
-                  <a:srgbClr val="FFFFFF"/>
-                </a:solidFill>
+                  <a:srgbClr val="FAF6EE"/>
+                </a:solidFill>
+                <a:latin typeface="Arial" pitchFamily="34" charset="0"/>
                 <a:ea typeface="Arial" pitchFamily="34" charset="-122"/>
                 <a:cs typeface="Arial" pitchFamily="34" charset="-120"/>
               </a:rPr>
@@ -2495,14 +2630,15 @@
           <a:bodyPr wrap="square" lIns="25400" tIns="25400" rIns="25400" bIns="25400" rtlCol="0" anchor="ctr"/>
           <a:lstStyle/>
           <a:p>
-            <a:pPr marL="0" indent="0" algn="ctr" rtl="1">
+            <a:pPr rtl="1" algn="ctr" indent="0" marL="0">
               <a:buNone/>
             </a:pPr>
             <a:r>
               <a:rPr lang="en-US" sz="1900" dirty="0">
                 <a:solidFill>
-                  <a:srgbClr val="FFFFFF"/>
-                </a:solidFill>
+                  <a:srgbClr val="FAF6EE"/>
+                </a:solidFill>
+                <a:latin typeface="Arial" pitchFamily="34" charset="0"/>
                 <a:ea typeface="Arial" pitchFamily="34" charset="-122"/>
                 <a:cs typeface="Arial" pitchFamily="34" charset="-120"/>
               </a:rPr>
@@ -2533,14 +2669,15 @@
           <a:bodyPr wrap="square" lIns="25400" tIns="25400" rIns="25400" bIns="25400" rtlCol="0" anchor="ctr"/>
           <a:lstStyle/>
           <a:p>
-            <a:pPr marL="0" indent="0" algn="ctr" rtl="1">
+            <a:pPr rtl="1" algn="ctr" indent="0" marL="0">
               <a:buNone/>
             </a:pPr>
             <a:r>
               <a:rPr lang="en-US" sz="1900" dirty="0">
                 <a:solidFill>
-                  <a:srgbClr val="FFFFFF"/>
-                </a:solidFill>
+                  <a:srgbClr val="FAF6EE"/>
+                </a:solidFill>
+                <a:latin typeface="Arial" pitchFamily="34" charset="0"/>
                 <a:ea typeface="Arial" pitchFamily="34" charset="-122"/>
                 <a:cs typeface="Arial" pitchFamily="34" charset="-120"/>
               </a:rPr>
@@ -2571,14 +2708,15 @@
           <a:bodyPr wrap="square" lIns="25400" tIns="25400" rIns="25400" bIns="25400" rtlCol="0" anchor="ctr"/>
           <a:lstStyle/>
           <a:p>
-            <a:pPr marL="0" indent="0" algn="ctr" rtl="1">
+            <a:pPr rtl="1" algn="ctr" indent="0" marL="0">
               <a:buNone/>
             </a:pPr>
             <a:r>
               <a:rPr lang="en-US" sz="1900" dirty="0">
                 <a:solidFill>
-                  <a:srgbClr val="FFFFFF"/>
-                </a:solidFill>
+                  <a:srgbClr val="FAF6EE"/>
+                </a:solidFill>
+                <a:latin typeface="Arial" pitchFamily="34" charset="0"/>
                 <a:ea typeface="Arial" pitchFamily="34" charset="-122"/>
                 <a:cs typeface="Arial" pitchFamily="34" charset="-120"/>
               </a:rPr>
@@ -2605,18 +2743,11 @@
           <a:noFill/>
           <a:ln w="38100">
             <a:solidFill>
-              <a:srgbClr val="95E0BE"/>
+              <a:srgbClr val="F5EDD8"/>
             </a:solidFill>
             <a:prstDash val="solid"/>
           </a:ln>
         </p:spPr>
-        <p:txBody>
-          <a:bodyPr/>
-          <a:lstStyle/>
-          <a:p>
-            <a:endParaRPr lang="he-IL"/>
-          </a:p>
-        </p:txBody>
       </p:sp>
       <p:sp>
         <p:nvSpPr>
@@ -2633,29 +2764,22 @@
             <a:avLst/>
           </a:prstGeom>
           <a:solidFill>
-            <a:srgbClr val="5C2F8A"/>
+            <a:srgbClr val="38283A"/>
           </a:solidFill>
           <a:ln w="6350">
             <a:solidFill>
-              <a:srgbClr val="FFFFFF"/>
+              <a:srgbClr val="FAF6EE"/>
             </a:solidFill>
             <a:prstDash val="solid"/>
           </a:ln>
           <a:effectLst>
-            <a:outerShdw blurRad="101600" dist="38100" dir="8100000" algn="bl" rotWithShape="0">
+            <a:outerShdw sx="100000" sy="100000" kx="0" ky="0" algn="bl" rotWithShape="0" blurRad="101600" dist="38100" dir="8100000">
               <a:srgbClr val="000000">
                 <a:alpha val="30000"/>
               </a:srgbClr>
             </a:outerShdw>
           </a:effectLst>
         </p:spPr>
-        <p:txBody>
-          <a:bodyPr/>
-          <a:lstStyle/>
-          <a:p>
-            <a:endParaRPr lang="he-IL"/>
-          </a:p>
-        </p:txBody>
       </p:sp>
       <p:sp>
         <p:nvSpPr>
@@ -2678,14 +2802,15 @@
           <a:bodyPr wrap="square" lIns="50800" tIns="50800" rIns="50800" bIns="50800" rtlCol="0" anchor="t"/>
           <a:lstStyle/>
           <a:p>
-            <a:pPr marL="0" indent="0" algn="ctr">
+            <a:pPr algn="ctr" indent="0" marL="0">
               <a:buNone/>
             </a:pPr>
             <a:r>
               <a:rPr lang="en-US" sz="2700" b="1" dirty="0">
                 <a:solidFill>
-                  <a:srgbClr val="FFFFFF"/>
-                </a:solidFill>
+                  <a:srgbClr val="FAF6EE"/>
+                </a:solidFill>
+                <a:latin typeface="Arial" pitchFamily="34" charset="0"/>
                 <a:ea typeface="Arial" pitchFamily="34" charset="-122"/>
                 <a:cs typeface="Arial" pitchFamily="34" charset="-120"/>
               </a:rPr>
@@ -2710,22 +2835,15 @@
             <a:avLst/>
           </a:prstGeom>
           <a:solidFill>
-            <a:srgbClr val="FFFFFF"/>
+            <a:srgbClr val="FAF6EE"/>
           </a:solidFill>
           <a:ln w="12700">
             <a:solidFill>
-              <a:srgbClr val="FFFFFF"/>
+              <a:srgbClr val="FAF6EE"/>
             </a:solidFill>
             <a:prstDash val="solid"/>
           </a:ln>
         </p:spPr>
-        <p:txBody>
-          <a:bodyPr/>
-          <a:lstStyle/>
-          <a:p>
-            <a:endParaRPr lang="he-IL"/>
-          </a:p>
-        </p:txBody>
       </p:sp>
       <p:sp>
         <p:nvSpPr>
@@ -2748,14 +2866,15 @@
           <a:bodyPr wrap="square" lIns="25400" tIns="25400" rIns="25400" bIns="25400" rtlCol="0" anchor="ctr"/>
           <a:lstStyle/>
           <a:p>
-            <a:pPr marL="0" indent="0" algn="ctr" rtl="1">
+            <a:pPr rtl="1" algn="ctr" indent="0" marL="0">
               <a:buNone/>
             </a:pPr>
             <a:r>
               <a:rPr lang="en-US" sz="1900" dirty="0">
                 <a:solidFill>
-                  <a:srgbClr val="FFFFFF"/>
-                </a:solidFill>
+                  <a:srgbClr val="FAF6EE"/>
+                </a:solidFill>
+                <a:latin typeface="Arial" pitchFamily="34" charset="0"/>
                 <a:ea typeface="Arial" pitchFamily="34" charset="-122"/>
                 <a:cs typeface="Arial" pitchFamily="34" charset="-120"/>
               </a:rPr>
@@ -2786,14 +2905,15 @@
           <a:bodyPr wrap="square" lIns="25400" tIns="25400" rIns="25400" bIns="25400" rtlCol="0" anchor="ctr"/>
           <a:lstStyle/>
           <a:p>
-            <a:pPr marL="0" indent="0" algn="ctr" rtl="1">
+            <a:pPr rtl="1" algn="ctr" indent="0" marL="0">
               <a:buNone/>
             </a:pPr>
             <a:r>
               <a:rPr lang="en-US" sz="1900" dirty="0">
                 <a:solidFill>
-                  <a:srgbClr val="FFFFFF"/>
-                </a:solidFill>
+                  <a:srgbClr val="FAF6EE"/>
+                </a:solidFill>
+                <a:latin typeface="Arial" pitchFamily="34" charset="0"/>
                 <a:ea typeface="Arial" pitchFamily="34" charset="-122"/>
                 <a:cs typeface="Arial" pitchFamily="34" charset="-120"/>
               </a:rPr>
@@ -2824,14 +2944,15 @@
           <a:bodyPr wrap="square" lIns="25400" tIns="25400" rIns="25400" bIns="25400" rtlCol="0" anchor="ctr"/>
           <a:lstStyle/>
           <a:p>
-            <a:pPr marL="0" indent="0" algn="ctr" rtl="1">
+            <a:pPr rtl="1" algn="ctr" indent="0" marL="0">
               <a:buNone/>
             </a:pPr>
             <a:r>
               <a:rPr lang="en-US" sz="1900" dirty="0">
                 <a:solidFill>
-                  <a:srgbClr val="FFFFFF"/>
-                </a:solidFill>
+                  <a:srgbClr val="FAF6EE"/>
+                </a:solidFill>
+                <a:latin typeface="Arial" pitchFamily="34" charset="0"/>
                 <a:ea typeface="Arial" pitchFamily="34" charset="-122"/>
                 <a:cs typeface="Arial" pitchFamily="34" charset="-120"/>
               </a:rPr>
@@ -2862,14 +2983,15 @@
           <a:bodyPr wrap="square" lIns="25400" tIns="25400" rIns="25400" bIns="25400" rtlCol="0" anchor="ctr"/>
           <a:lstStyle/>
           <a:p>
-            <a:pPr marL="0" indent="0" algn="ctr" rtl="1">
+            <a:pPr rtl="1" algn="ctr" indent="0" marL="0">
               <a:buNone/>
             </a:pPr>
             <a:r>
               <a:rPr lang="en-US" sz="1900" dirty="0">
                 <a:solidFill>
-                  <a:srgbClr val="FFFFFF"/>
-                </a:solidFill>
+                  <a:srgbClr val="FAF6EE"/>
+                </a:solidFill>
+                <a:latin typeface="Arial" pitchFamily="34" charset="0"/>
                 <a:ea typeface="Arial" pitchFamily="34" charset="-122"/>
                 <a:cs typeface="Arial" pitchFamily="34" charset="-120"/>
               </a:rPr>
@@ -2896,18 +3018,11 @@
           <a:noFill/>
           <a:ln w="38100">
             <a:solidFill>
-              <a:srgbClr val="95E0BE"/>
+              <a:srgbClr val="F5EDD8"/>
             </a:solidFill>
             <a:prstDash val="solid"/>
           </a:ln>
         </p:spPr>
-        <p:txBody>
-          <a:bodyPr/>
-          <a:lstStyle/>
-          <a:p>
-            <a:endParaRPr lang="he-IL"/>
-          </a:p>
-        </p:txBody>
       </p:sp>
       <p:sp>
         <p:nvSpPr>
@@ -2924,29 +3039,22 @@
             <a:avLst/>
           </a:prstGeom>
           <a:solidFill>
-            <a:srgbClr val="8A6A10"/>
+            <a:srgbClr val="4A3008"/>
           </a:solidFill>
           <a:ln w="6350">
             <a:solidFill>
-              <a:srgbClr val="FFFFFF"/>
+              <a:srgbClr val="FAF6EE"/>
             </a:solidFill>
             <a:prstDash val="solid"/>
           </a:ln>
           <a:effectLst>
-            <a:outerShdw blurRad="101600" dist="38100" dir="8100000" algn="bl" rotWithShape="0">
+            <a:outerShdw sx="100000" sy="100000" kx="0" ky="0" algn="bl" rotWithShape="0" blurRad="101600" dist="38100" dir="8100000">
               <a:srgbClr val="000000">
                 <a:alpha val="30000"/>
               </a:srgbClr>
             </a:outerShdw>
           </a:effectLst>
         </p:spPr>
-        <p:txBody>
-          <a:bodyPr/>
-          <a:lstStyle/>
-          <a:p>
-            <a:endParaRPr lang="he-IL"/>
-          </a:p>
-        </p:txBody>
       </p:sp>
       <p:sp>
         <p:nvSpPr>
@@ -2969,14 +3077,15 @@
           <a:bodyPr wrap="square" lIns="50800" tIns="50800" rIns="50800" bIns="50800" rtlCol="0" anchor="t"/>
           <a:lstStyle/>
           <a:p>
-            <a:pPr marL="0" indent="0" algn="ctr">
+            <a:pPr algn="ctr" indent="0" marL="0">
               <a:buNone/>
             </a:pPr>
             <a:r>
               <a:rPr lang="en-US" sz="2700" b="1" dirty="0">
                 <a:solidFill>
-                  <a:srgbClr val="FFFFFF"/>
-                </a:solidFill>
+                  <a:srgbClr val="FAF6EE"/>
+                </a:solidFill>
+                <a:latin typeface="Arial" pitchFamily="34" charset="0"/>
                 <a:ea typeface="Arial" pitchFamily="34" charset="-122"/>
                 <a:cs typeface="Arial" pitchFamily="34" charset="-120"/>
               </a:rPr>
@@ -3001,22 +3110,15 @@
             <a:avLst/>
           </a:prstGeom>
           <a:solidFill>
-            <a:srgbClr val="FFFFFF"/>
+            <a:srgbClr val="FAF6EE"/>
           </a:solidFill>
           <a:ln w="12700">
             <a:solidFill>
-              <a:srgbClr val="FFFFFF"/>
+              <a:srgbClr val="FAF6EE"/>
             </a:solidFill>
             <a:prstDash val="solid"/>
           </a:ln>
         </p:spPr>
-        <p:txBody>
-          <a:bodyPr/>
-          <a:lstStyle/>
-          <a:p>
-            <a:endParaRPr lang="he-IL"/>
-          </a:p>
-        </p:txBody>
       </p:sp>
       <p:sp>
         <p:nvSpPr>
@@ -3039,14 +3141,15 @@
           <a:bodyPr wrap="square" lIns="25400" tIns="25400" rIns="25400" bIns="25400" rtlCol="0" anchor="ctr"/>
           <a:lstStyle/>
           <a:p>
-            <a:pPr marL="0" indent="0" algn="ctr" rtl="1">
+            <a:pPr rtl="1" algn="ctr" indent="0" marL="0">
               <a:buNone/>
             </a:pPr>
             <a:r>
               <a:rPr lang="en-US" sz="1900" dirty="0">
                 <a:solidFill>
-                  <a:srgbClr val="FFFFFF"/>
-                </a:solidFill>
+                  <a:srgbClr val="FAF6EE"/>
+                </a:solidFill>
+                <a:latin typeface="Arial" pitchFamily="34" charset="0"/>
                 <a:ea typeface="Arial" pitchFamily="34" charset="-122"/>
                 <a:cs typeface="Arial" pitchFamily="34" charset="-120"/>
               </a:rPr>
@@ -3077,14 +3180,15 @@
           <a:bodyPr wrap="square" lIns="25400" tIns="25400" rIns="25400" bIns="25400" rtlCol="0" anchor="ctr"/>
           <a:lstStyle/>
           <a:p>
-            <a:pPr marL="0" indent="0" algn="ctr" rtl="1">
+            <a:pPr rtl="1" algn="ctr" indent="0" marL="0">
               <a:buNone/>
             </a:pPr>
             <a:r>
               <a:rPr lang="en-US" sz="1900" dirty="0">
                 <a:solidFill>
-                  <a:srgbClr val="FFFFFF"/>
-                </a:solidFill>
+                  <a:srgbClr val="FAF6EE"/>
+                </a:solidFill>
+                <a:latin typeface="Arial" pitchFamily="34" charset="0"/>
                 <a:ea typeface="Arial" pitchFamily="34" charset="-122"/>
                 <a:cs typeface="Arial" pitchFamily="34" charset="-120"/>
               </a:rPr>
@@ -3115,14 +3219,15 @@
           <a:bodyPr wrap="square" lIns="25400" tIns="25400" rIns="25400" bIns="25400" rtlCol="0" anchor="ctr"/>
           <a:lstStyle/>
           <a:p>
-            <a:pPr marL="0" indent="0" algn="ctr" rtl="1">
+            <a:pPr rtl="1" algn="ctr" indent="0" marL="0">
               <a:buNone/>
             </a:pPr>
             <a:r>
               <a:rPr lang="en-US" sz="1900" dirty="0">
                 <a:solidFill>
-                  <a:srgbClr val="FFFFFF"/>
-                </a:solidFill>
+                  <a:srgbClr val="FAF6EE"/>
+                </a:solidFill>
+                <a:latin typeface="Arial" pitchFamily="34" charset="0"/>
                 <a:ea typeface="Arial" pitchFamily="34" charset="-122"/>
                 <a:cs typeface="Arial" pitchFamily="34" charset="-120"/>
               </a:rPr>
@@ -3153,14 +3258,15 @@
           <a:bodyPr wrap="square" lIns="25400" tIns="25400" rIns="25400" bIns="25400" rtlCol="0" anchor="ctr"/>
           <a:lstStyle/>
           <a:p>
-            <a:pPr marL="0" indent="0" algn="ctr" rtl="1">
+            <a:pPr rtl="1" algn="ctr" indent="0" marL="0">
               <a:buNone/>
             </a:pPr>
             <a:r>
               <a:rPr lang="en-US" sz="1900" dirty="0">
                 <a:solidFill>
-                  <a:srgbClr val="FFFFFF"/>
-                </a:solidFill>
+                  <a:srgbClr val="FAF6EE"/>
+                </a:solidFill>
+                <a:latin typeface="Arial" pitchFamily="34" charset="0"/>
                 <a:ea typeface="Arial" pitchFamily="34" charset="-122"/>
                 <a:cs typeface="Arial" pitchFamily="34" charset="-120"/>
               </a:rPr>
@@ -3187,18 +3293,11 @@
           <a:noFill/>
           <a:ln w="38100">
             <a:solidFill>
-              <a:srgbClr val="95E0BE"/>
+              <a:srgbClr val="F5EDD8"/>
             </a:solidFill>
             <a:prstDash val="solid"/>
           </a:ln>
         </p:spPr>
-        <p:txBody>
-          <a:bodyPr/>
-          <a:lstStyle/>
-          <a:p>
-            <a:endParaRPr lang="he-IL"/>
-          </a:p>
-        </p:txBody>
       </p:sp>
       <p:sp>
         <p:nvSpPr>
@@ -3215,29 +3314,22 @@
             <a:avLst/>
           </a:prstGeom>
           <a:solidFill>
-            <a:srgbClr val="8A2020"/>
+            <a:srgbClr val="3A1818"/>
           </a:solidFill>
           <a:ln w="6350">
             <a:solidFill>
-              <a:srgbClr val="FFFFFF"/>
+              <a:srgbClr val="FAF6EE"/>
             </a:solidFill>
             <a:prstDash val="solid"/>
           </a:ln>
           <a:effectLst>
-            <a:outerShdw blurRad="101600" dist="38100" dir="8100000" algn="bl" rotWithShape="0">
+            <a:outerShdw sx="100000" sy="100000" kx="0" ky="0" algn="bl" rotWithShape="0" blurRad="101600" dist="38100" dir="8100000">
               <a:srgbClr val="000000">
                 <a:alpha val="30000"/>
               </a:srgbClr>
             </a:outerShdw>
           </a:effectLst>
         </p:spPr>
-        <p:txBody>
-          <a:bodyPr/>
-          <a:lstStyle/>
-          <a:p>
-            <a:endParaRPr lang="he-IL"/>
-          </a:p>
-        </p:txBody>
       </p:sp>
       <p:sp>
         <p:nvSpPr>
@@ -3260,14 +3352,15 @@
           <a:bodyPr wrap="square" lIns="50800" tIns="50800" rIns="50800" bIns="50800" rtlCol="0" anchor="t"/>
           <a:lstStyle/>
           <a:p>
-            <a:pPr marL="0" indent="0" algn="ctr">
+            <a:pPr algn="ctr" indent="0" marL="0">
               <a:buNone/>
             </a:pPr>
             <a:r>
               <a:rPr lang="en-US" sz="2700" b="1" dirty="0">
                 <a:solidFill>
-                  <a:srgbClr val="FFFFFF"/>
-                </a:solidFill>
+                  <a:srgbClr val="FAF6EE"/>
+                </a:solidFill>
+                <a:latin typeface="Arial" pitchFamily="34" charset="0"/>
                 <a:ea typeface="Arial" pitchFamily="34" charset="-122"/>
                 <a:cs typeface="Arial" pitchFamily="34" charset="-120"/>
               </a:rPr>
@@ -3292,22 +3385,15 @@
             <a:avLst/>
           </a:prstGeom>
           <a:solidFill>
-            <a:srgbClr val="FFFFFF"/>
+            <a:srgbClr val="FAF6EE"/>
           </a:solidFill>
           <a:ln w="12700">
             <a:solidFill>
-              <a:srgbClr val="FFFFFF"/>
+              <a:srgbClr val="FAF6EE"/>
             </a:solidFill>
             <a:prstDash val="solid"/>
           </a:ln>
         </p:spPr>
-        <p:txBody>
-          <a:bodyPr/>
-          <a:lstStyle/>
-          <a:p>
-            <a:endParaRPr lang="he-IL"/>
-          </a:p>
-        </p:txBody>
       </p:sp>
       <p:sp>
         <p:nvSpPr>
@@ -3330,14 +3416,15 @@
           <a:bodyPr wrap="square" lIns="25400" tIns="25400" rIns="25400" bIns="25400" rtlCol="0" anchor="ctr"/>
           <a:lstStyle/>
           <a:p>
-            <a:pPr marL="0" indent="0" algn="ctr" rtl="1">
+            <a:pPr rtl="1" algn="ctr" indent="0" marL="0">
               <a:buNone/>
             </a:pPr>
             <a:r>
               <a:rPr lang="en-US" sz="1900" dirty="0">
                 <a:solidFill>
-                  <a:srgbClr val="FFFFFF"/>
-                </a:solidFill>
+                  <a:srgbClr val="FAF6EE"/>
+                </a:solidFill>
+                <a:latin typeface="Arial" pitchFamily="34" charset="0"/>
                 <a:ea typeface="Arial" pitchFamily="34" charset="-122"/>
                 <a:cs typeface="Arial" pitchFamily="34" charset="-120"/>
               </a:rPr>
@@ -3368,14 +3455,15 @@
           <a:bodyPr wrap="square" lIns="25400" tIns="25400" rIns="25400" bIns="25400" rtlCol="0" anchor="ctr"/>
           <a:lstStyle/>
           <a:p>
-            <a:pPr marL="0" indent="0" algn="ctr" rtl="1">
+            <a:pPr rtl="1" algn="ctr" indent="0" marL="0">
               <a:buNone/>
             </a:pPr>
             <a:r>
               <a:rPr lang="en-US" sz="1900" dirty="0">
                 <a:solidFill>
-                  <a:srgbClr val="FFFFFF"/>
-                </a:solidFill>
+                  <a:srgbClr val="FAF6EE"/>
+                </a:solidFill>
+                <a:latin typeface="Arial" pitchFamily="34" charset="0"/>
                 <a:ea typeface="Arial" pitchFamily="34" charset="-122"/>
                 <a:cs typeface="Arial" pitchFamily="34" charset="-120"/>
               </a:rPr>
@@ -3406,14 +3494,15 @@
           <a:bodyPr wrap="square" lIns="25400" tIns="25400" rIns="25400" bIns="25400" rtlCol="0" anchor="ctr"/>
           <a:lstStyle/>
           <a:p>
-            <a:pPr marL="0" indent="0" algn="ctr" rtl="1">
+            <a:pPr rtl="1" algn="ctr" indent="0" marL="0">
               <a:buNone/>
             </a:pPr>
             <a:r>
               <a:rPr lang="en-US" sz="1900" dirty="0">
                 <a:solidFill>
-                  <a:srgbClr val="FFFFFF"/>
-                </a:solidFill>
+                  <a:srgbClr val="FAF6EE"/>
+                </a:solidFill>
+                <a:latin typeface="Arial" pitchFamily="34" charset="0"/>
                 <a:ea typeface="Arial" pitchFamily="34" charset="-122"/>
                 <a:cs typeface="Arial" pitchFamily="34" charset="-120"/>
               </a:rPr>
@@ -3444,14 +3533,15 @@
           <a:bodyPr wrap="square" lIns="25400" tIns="25400" rIns="25400" bIns="25400" rtlCol="0" anchor="ctr"/>
           <a:lstStyle/>
           <a:p>
-            <a:pPr marL="0" indent="0" algn="ctr" rtl="1">
+            <a:pPr rtl="1" algn="ctr" indent="0" marL="0">
               <a:buNone/>
             </a:pPr>
             <a:r>
               <a:rPr lang="en-US" sz="1900" dirty="0">
                 <a:solidFill>
-                  <a:srgbClr val="FFFFFF"/>
-                </a:solidFill>
+                  <a:srgbClr val="FAF6EE"/>
+                </a:solidFill>
+                <a:latin typeface="Arial" pitchFamily="34" charset="0"/>
                 <a:ea typeface="Arial" pitchFamily="34" charset="-122"/>
                 <a:cs typeface="Arial" pitchFamily="34" charset="-120"/>
               </a:rPr>
@@ -3476,29 +3566,22 @@
             <a:avLst/>
           </a:prstGeom>
           <a:solidFill>
-            <a:srgbClr val="102030"/>
+            <a:srgbClr val="241D16"/>
           </a:solidFill>
           <a:ln w="15240">
             <a:solidFill>
-              <a:srgbClr val="2D9C6B"/>
+              <a:srgbClr val="ECC31C"/>
             </a:solidFill>
             <a:prstDash val="solid"/>
           </a:ln>
           <a:effectLst>
-            <a:outerShdw blurRad="101600" dist="38100" dir="8100000" algn="bl" rotWithShape="0">
+            <a:outerShdw sx="100000" sy="100000" kx="0" ky="0" algn="bl" rotWithShape="0" blurRad="101600" dist="38100" dir="8100000">
               <a:srgbClr val="000000">
                 <a:alpha val="30000"/>
               </a:srgbClr>
             </a:outerShdw>
           </a:effectLst>
         </p:spPr>
-        <p:txBody>
-          <a:bodyPr/>
-          <a:lstStyle/>
-          <a:p>
-            <a:endParaRPr lang="he-IL"/>
-          </a:p>
-        </p:txBody>
       </p:sp>
       <p:sp>
         <p:nvSpPr>
@@ -3521,14 +3604,15 @@
           <a:bodyPr wrap="square" lIns="0" tIns="0" rIns="0" bIns="0" rtlCol="0" anchor="ctr"/>
           <a:lstStyle/>
           <a:p>
-            <a:pPr marL="0" indent="0" algn="r" rtl="1">
+            <a:pPr rtl="1" algn="r" indent="0" marL="0">
               <a:buNone/>
             </a:pPr>
             <a:r>
               <a:rPr lang="en-US" sz="3800" b="1" dirty="0">
                 <a:solidFill>
-                  <a:srgbClr val="52B788"/>
-                </a:solidFill>
+                  <a:srgbClr val="D4A040"/>
+                </a:solidFill>
+                <a:latin typeface="Arial" pitchFamily="34" charset="0"/>
                 <a:ea typeface="Arial" pitchFamily="34" charset="-122"/>
                 <a:cs typeface="Arial" pitchFamily="34" charset="-120"/>
               </a:rPr>
@@ -3553,29 +3637,22 @@
             <a:avLst/>
           </a:prstGeom>
           <a:solidFill>
-            <a:srgbClr val="172840"/>
+            <a:srgbClr val="2E2519"/>
           </a:solidFill>
           <a:ln w="15240">
             <a:solidFill>
-              <a:srgbClr val="52B788"/>
+              <a:srgbClr val="D4A040"/>
             </a:solidFill>
             <a:prstDash val="solid"/>
           </a:ln>
           <a:effectLst>
-            <a:outerShdw blurRad="101600" dist="38100" dir="8100000" algn="bl" rotWithShape="0">
+            <a:outerShdw sx="100000" sy="100000" kx="0" ky="0" algn="bl" rotWithShape="0" blurRad="101600" dist="38100" dir="8100000">
               <a:srgbClr val="000000">
                 <a:alpha val="30000"/>
               </a:srgbClr>
             </a:outerShdw>
           </a:effectLst>
         </p:spPr>
-        <p:txBody>
-          <a:bodyPr/>
-          <a:lstStyle/>
-          <a:p>
-            <a:endParaRPr lang="he-IL"/>
-          </a:p>
-        </p:txBody>
       </p:sp>
       <p:sp>
         <p:nvSpPr>
@@ -3598,14 +3675,15 @@
           <a:bodyPr wrap="square" lIns="0" tIns="0" rIns="0" bIns="0" rtlCol="0" anchor="t"/>
           <a:lstStyle/>
           <a:p>
-            <a:pPr marL="0" indent="0" algn="r" rtl="1">
+            <a:pPr rtl="1" algn="r" indent="0" marL="0">
               <a:buNone/>
             </a:pPr>
             <a:r>
               <a:rPr lang="en-US" sz="2800" b="1" dirty="0">
                 <a:solidFill>
-                  <a:srgbClr val="52B788"/>
-                </a:solidFill>
+                  <a:srgbClr val="D4A040"/>
+                </a:solidFill>
+                <a:latin typeface="Arial" pitchFamily="34" charset="0"/>
                 <a:ea typeface="Arial" pitchFamily="34" charset="-122"/>
                 <a:cs typeface="Arial" pitchFamily="34" charset="-120"/>
               </a:rPr>
@@ -3636,14 +3714,15 @@
           <a:bodyPr wrap="square" lIns="0" tIns="0" rIns="0" bIns="0" rtlCol="0" anchor="t"/>
           <a:lstStyle/>
           <a:p>
-            <a:pPr marL="0" indent="0" algn="r" rtl="1">
+            <a:pPr rtl="1" algn="r" indent="0" marL="0">
               <a:buNone/>
             </a:pPr>
             <a:r>
               <a:rPr lang="en-US" sz="1700" dirty="0">
                 <a:solidFill>
-                  <a:srgbClr val="7FAFC0"/>
-                </a:solidFill>
+                  <a:srgbClr val="9E8E7A"/>
+                </a:solidFill>
+                <a:latin typeface="Arial" pitchFamily="34" charset="0"/>
                 <a:ea typeface="Arial" pitchFamily="34" charset="-122"/>
                 <a:cs typeface="Arial" pitchFamily="34" charset="-120"/>
               </a:rPr>
@@ -3668,29 +3747,22 @@
             <a:avLst/>
           </a:prstGeom>
           <a:solidFill>
-            <a:srgbClr val="172840"/>
+            <a:srgbClr val="2E2519"/>
           </a:solidFill>
           <a:ln w="15240">
             <a:solidFill>
-              <a:srgbClr val="5B9BD5"/>
+              <a:srgbClr val="BF9A58"/>
             </a:solidFill>
             <a:prstDash val="solid"/>
           </a:ln>
           <a:effectLst>
-            <a:outerShdw blurRad="101600" dist="38100" dir="8100000" algn="bl" rotWithShape="0">
+            <a:outerShdw sx="100000" sy="100000" kx="0" ky="0" algn="bl" rotWithShape="0" blurRad="101600" dist="38100" dir="8100000">
               <a:srgbClr val="000000">
                 <a:alpha val="30000"/>
               </a:srgbClr>
             </a:outerShdw>
           </a:effectLst>
         </p:spPr>
-        <p:txBody>
-          <a:bodyPr/>
-          <a:lstStyle/>
-          <a:p>
-            <a:endParaRPr lang="he-IL"/>
-          </a:p>
-        </p:txBody>
       </p:sp>
       <p:sp>
         <p:nvSpPr>
@@ -3713,14 +3785,15 @@
           <a:bodyPr wrap="square" lIns="0" tIns="0" rIns="0" bIns="0" rtlCol="0" anchor="t"/>
           <a:lstStyle/>
           <a:p>
-            <a:pPr marL="0" indent="0" algn="r" rtl="1">
+            <a:pPr rtl="1" algn="r" indent="0" marL="0">
               <a:buNone/>
             </a:pPr>
             <a:r>
               <a:rPr lang="en-US" sz="2800" b="1" dirty="0">
                 <a:solidFill>
-                  <a:srgbClr val="5B9BD5"/>
-                </a:solidFill>
+                  <a:srgbClr val="BF9A58"/>
+                </a:solidFill>
+                <a:latin typeface="Arial" pitchFamily="34" charset="0"/>
                 <a:ea typeface="Arial" pitchFamily="34" charset="-122"/>
                 <a:cs typeface="Arial" pitchFamily="34" charset="-120"/>
               </a:rPr>
@@ -3751,14 +3824,15 @@
           <a:bodyPr wrap="square" lIns="0" tIns="0" rIns="0" bIns="0" rtlCol="0" anchor="t"/>
           <a:lstStyle/>
           <a:p>
-            <a:pPr marL="0" indent="0" algn="r" rtl="1">
+            <a:pPr rtl="1" algn="r" indent="0" marL="0">
               <a:buNone/>
             </a:pPr>
             <a:r>
               <a:rPr lang="en-US" sz="1700" dirty="0">
                 <a:solidFill>
-                  <a:srgbClr val="7FAFC0"/>
-                </a:solidFill>
+                  <a:srgbClr val="9E8E7A"/>
+                </a:solidFill>
+                <a:latin typeface="Arial" pitchFamily="34" charset="0"/>
                 <a:ea typeface="Arial" pitchFamily="34" charset="-122"/>
                 <a:cs typeface="Arial" pitchFamily="34" charset="-120"/>
               </a:rPr>
@@ -3783,29 +3857,22 @@
             <a:avLst/>
           </a:prstGeom>
           <a:solidFill>
-            <a:srgbClr val="172840"/>
+            <a:srgbClr val="2E2519"/>
           </a:solidFill>
           <a:ln w="15240">
             <a:solidFill>
-              <a:srgbClr val="D4A256"/>
+              <a:srgbClr val="C8A882"/>
             </a:solidFill>
             <a:prstDash val="solid"/>
           </a:ln>
           <a:effectLst>
-            <a:outerShdw blurRad="101600" dist="38100" dir="8100000" algn="bl" rotWithShape="0">
+            <a:outerShdw sx="100000" sy="100000" kx="0" ky="0" algn="bl" rotWithShape="0" blurRad="101600" dist="38100" dir="8100000">
               <a:srgbClr val="000000">
                 <a:alpha val="30000"/>
               </a:srgbClr>
             </a:outerShdw>
           </a:effectLst>
         </p:spPr>
-        <p:txBody>
-          <a:bodyPr/>
-          <a:lstStyle/>
-          <a:p>
-            <a:endParaRPr lang="he-IL"/>
-          </a:p>
-        </p:txBody>
       </p:sp>
       <p:sp>
         <p:nvSpPr>
@@ -3828,14 +3895,15 @@
           <a:bodyPr wrap="square" lIns="0" tIns="0" rIns="0" bIns="0" rtlCol="0" anchor="t"/>
           <a:lstStyle/>
           <a:p>
-            <a:pPr marL="0" indent="0" algn="r" rtl="1">
+            <a:pPr rtl="1" algn="r" indent="0" marL="0">
               <a:buNone/>
             </a:pPr>
             <a:r>
               <a:rPr lang="en-US" sz="2800" b="1" dirty="0">
                 <a:solidFill>
-                  <a:srgbClr val="D4A256"/>
-                </a:solidFill>
+                  <a:srgbClr val="C8A882"/>
+                </a:solidFill>
+                <a:latin typeface="Arial" pitchFamily="34" charset="0"/>
                 <a:ea typeface="Arial" pitchFamily="34" charset="-122"/>
                 <a:cs typeface="Arial" pitchFamily="34" charset="-120"/>
               </a:rPr>
@@ -3866,14 +3934,15 @@
           <a:bodyPr wrap="square" lIns="0" tIns="0" rIns="0" bIns="0" rtlCol="0" anchor="t"/>
           <a:lstStyle/>
           <a:p>
-            <a:pPr marL="0" indent="0" algn="r" rtl="1">
+            <a:pPr rtl="1" algn="r" indent="0" marL="0">
               <a:buNone/>
             </a:pPr>
             <a:r>
               <a:rPr lang="en-US" sz="1700" dirty="0">
                 <a:solidFill>
-                  <a:srgbClr val="7FAFC0"/>
-                </a:solidFill>
+                  <a:srgbClr val="9E8E7A"/>
+                </a:solidFill>
+                <a:latin typeface="Arial" pitchFamily="34" charset="0"/>
                 <a:ea typeface="Arial" pitchFamily="34" charset="-122"/>
                 <a:cs typeface="Arial" pitchFamily="34" charset="-120"/>
               </a:rPr>
@@ -3898,29 +3967,22 @@
             <a:avLst/>
           </a:prstGeom>
           <a:solidFill>
-            <a:srgbClr val="102030"/>
+            <a:srgbClr val="241D16"/>
           </a:solidFill>
           <a:ln w="15240">
             <a:solidFill>
-              <a:srgbClr val="2D9C6B"/>
+              <a:srgbClr val="ECC31C"/>
             </a:solidFill>
             <a:prstDash val="solid"/>
           </a:ln>
           <a:effectLst>
-            <a:outerShdw blurRad="101600" dist="38100" dir="8100000" algn="bl" rotWithShape="0">
+            <a:outerShdw sx="100000" sy="100000" kx="0" ky="0" algn="bl" rotWithShape="0" blurRad="101600" dist="38100" dir="8100000">
               <a:srgbClr val="000000">
                 <a:alpha val="30000"/>
               </a:srgbClr>
             </a:outerShdw>
           </a:effectLst>
         </p:spPr>
-        <p:txBody>
-          <a:bodyPr/>
-          <a:lstStyle/>
-          <a:p>
-            <a:endParaRPr lang="he-IL"/>
-          </a:p>
-        </p:txBody>
       </p:sp>
       <p:sp>
         <p:nvSpPr>
@@ -3943,14 +4005,15 @@
           <a:bodyPr wrap="square" lIns="0" tIns="0" rIns="0" bIns="0" rtlCol="0" anchor="ctr"/>
           <a:lstStyle/>
           <a:p>
-            <a:pPr marL="0" indent="0" algn="r" rtl="1">
+            <a:pPr rtl="1" algn="r" indent="0" marL="0">
               <a:buNone/>
             </a:pPr>
             <a:r>
               <a:rPr lang="en-US" sz="3800" b="1" dirty="0">
                 <a:solidFill>
-                  <a:srgbClr val="52B788"/>
-                </a:solidFill>
+                  <a:srgbClr val="D4A040"/>
+                </a:solidFill>
+                <a:latin typeface="Arial" pitchFamily="34" charset="0"/>
                 <a:ea typeface="Arial" pitchFamily="34" charset="-122"/>
                 <a:cs typeface="Arial" pitchFamily="34" charset="-120"/>
               </a:rPr>
@@ -3975,22 +4038,15 @@
             <a:avLst/>
           </a:prstGeom>
           <a:solidFill>
-            <a:srgbClr val="2D9C6B"/>
+            <a:srgbClr val="ECC31C"/>
           </a:solidFill>
           <a:ln w="12700">
             <a:solidFill>
-              <a:srgbClr val="2D9C6B"/>
+              <a:srgbClr val="ECC31C"/>
             </a:solidFill>
             <a:prstDash val="solid"/>
           </a:ln>
         </p:spPr>
-        <p:txBody>
-          <a:bodyPr/>
-          <a:lstStyle/>
-          <a:p>
-            <a:endParaRPr lang="he-IL"/>
-          </a:p>
-        </p:txBody>
       </p:sp>
       <p:sp>
         <p:nvSpPr>
@@ -4013,14 +4069,15 @@
           <a:bodyPr wrap="square" lIns="0" tIns="0" rIns="0" bIns="0" rtlCol="0" anchor="t"/>
           <a:lstStyle/>
           <a:p>
-            <a:pPr marL="0" indent="0" algn="r" rtl="1">
+            <a:pPr rtl="1" algn="r" indent="0" marL="0">
               <a:buNone/>
             </a:pPr>
             <a:r>
               <a:rPr lang="en-US" sz="2300" b="1" dirty="0">
                 <a:solidFill>
-                  <a:srgbClr val="FFFFFF"/>
-                </a:solidFill>
+                  <a:srgbClr val="FAF6EE"/>
+                </a:solidFill>
+                <a:latin typeface="Arial" pitchFamily="34" charset="0"/>
                 <a:ea typeface="Arial" pitchFamily="34" charset="-122"/>
                 <a:cs typeface="Arial" pitchFamily="34" charset="-120"/>
               </a:rPr>
@@ -4051,14 +4108,15 @@
           <a:bodyPr wrap="square" lIns="0" tIns="0" rIns="0" bIns="0" rtlCol="0" anchor="t"/>
           <a:lstStyle/>
           <a:p>
-            <a:pPr marL="0" indent="0" algn="r" rtl="1">
+            <a:pPr rtl="1" algn="r" indent="0" marL="0">
               <a:buNone/>
             </a:pPr>
             <a:r>
               <a:rPr lang="en-US" sz="1700" dirty="0">
                 <a:solidFill>
-                  <a:srgbClr val="7FAFC0"/>
-                </a:solidFill>
+                  <a:srgbClr val="9E8E7A"/>
+                </a:solidFill>
+                <a:latin typeface="Arial" pitchFamily="34" charset="0"/>
                 <a:ea typeface="Arial" pitchFamily="34" charset="-122"/>
                 <a:cs typeface="Arial" pitchFamily="34" charset="-120"/>
               </a:rPr>
@@ -4083,22 +4141,15 @@
             <a:avLst/>
           </a:prstGeom>
           <a:solidFill>
-            <a:srgbClr val="2D9C6B"/>
+            <a:srgbClr val="ECC31C"/>
           </a:solidFill>
           <a:ln w="12700">
             <a:solidFill>
-              <a:srgbClr val="2D9C6B"/>
+              <a:srgbClr val="ECC31C"/>
             </a:solidFill>
             <a:prstDash val="solid"/>
           </a:ln>
         </p:spPr>
-        <p:txBody>
-          <a:bodyPr/>
-          <a:lstStyle/>
-          <a:p>
-            <a:endParaRPr lang="he-IL"/>
-          </a:p>
-        </p:txBody>
       </p:sp>
       <p:sp>
         <p:nvSpPr>
@@ -4121,14 +4172,15 @@
           <a:bodyPr wrap="square" lIns="0" tIns="0" rIns="0" bIns="0" rtlCol="0" anchor="t"/>
           <a:lstStyle/>
           <a:p>
-            <a:pPr marL="0" indent="0" algn="r" rtl="1">
+            <a:pPr rtl="1" algn="r" indent="0" marL="0">
               <a:buNone/>
             </a:pPr>
             <a:r>
               <a:rPr lang="en-US" sz="2300" b="1" dirty="0">
                 <a:solidFill>
-                  <a:srgbClr val="FFFFFF"/>
-                </a:solidFill>
+                  <a:srgbClr val="FAF6EE"/>
+                </a:solidFill>
+                <a:latin typeface="Arial" pitchFamily="34" charset="0"/>
                 <a:ea typeface="Arial" pitchFamily="34" charset="-122"/>
                 <a:cs typeface="Arial" pitchFamily="34" charset="-120"/>
               </a:rPr>
@@ -4159,14 +4211,15 @@
           <a:bodyPr wrap="square" lIns="0" tIns="0" rIns="0" bIns="0" rtlCol="0" anchor="t"/>
           <a:lstStyle/>
           <a:p>
-            <a:pPr marL="0" indent="0" algn="r" rtl="1">
+            <a:pPr rtl="1" algn="r" indent="0" marL="0">
               <a:buNone/>
             </a:pPr>
             <a:r>
               <a:rPr lang="en-US" sz="1700" dirty="0">
                 <a:solidFill>
-                  <a:srgbClr val="7FAFC0"/>
-                </a:solidFill>
+                  <a:srgbClr val="9E8E7A"/>
+                </a:solidFill>
+                <a:latin typeface="Arial" pitchFamily="34" charset="0"/>
                 <a:ea typeface="Arial" pitchFamily="34" charset="-122"/>
                 <a:cs typeface="Arial" pitchFamily="34" charset="-120"/>
               </a:rPr>
@@ -4191,22 +4244,15 @@
             <a:avLst/>
           </a:prstGeom>
           <a:solidFill>
-            <a:srgbClr val="2D9C6B"/>
+            <a:srgbClr val="ECC31C"/>
           </a:solidFill>
           <a:ln w="12700">
             <a:solidFill>
-              <a:srgbClr val="2D9C6B"/>
+              <a:srgbClr val="ECC31C"/>
             </a:solidFill>
             <a:prstDash val="solid"/>
           </a:ln>
         </p:spPr>
-        <p:txBody>
-          <a:bodyPr/>
-          <a:lstStyle/>
-          <a:p>
-            <a:endParaRPr lang="he-IL"/>
-          </a:p>
-        </p:txBody>
       </p:sp>
       <p:sp>
         <p:nvSpPr>
@@ -4229,14 +4275,15 @@
           <a:bodyPr wrap="square" lIns="0" tIns="0" rIns="0" bIns="0" rtlCol="0" anchor="t"/>
           <a:lstStyle/>
           <a:p>
-            <a:pPr marL="0" indent="0" algn="r" rtl="1">
+            <a:pPr rtl="1" algn="r" indent="0" marL="0">
               <a:buNone/>
             </a:pPr>
             <a:r>
               <a:rPr lang="en-US" sz="2300" b="1" dirty="0">
                 <a:solidFill>
-                  <a:srgbClr val="FFFFFF"/>
-                </a:solidFill>
+                  <a:srgbClr val="FAF6EE"/>
+                </a:solidFill>
+                <a:latin typeface="Arial" pitchFamily="34" charset="0"/>
                 <a:ea typeface="Arial" pitchFamily="34" charset="-122"/>
                 <a:cs typeface="Arial" pitchFamily="34" charset="-120"/>
               </a:rPr>
@@ -4267,14 +4314,15 @@
           <a:bodyPr wrap="square" lIns="0" tIns="0" rIns="0" bIns="0" rtlCol="0" anchor="t"/>
           <a:lstStyle/>
           <a:p>
-            <a:pPr marL="0" indent="0" algn="r" rtl="1">
+            <a:pPr rtl="1" algn="r" indent="0" marL="0">
               <a:buNone/>
             </a:pPr>
             <a:r>
               <a:rPr lang="en-US" sz="1700" dirty="0">
                 <a:solidFill>
-                  <a:srgbClr val="7FAFC0"/>
-                </a:solidFill>
+                  <a:srgbClr val="9E8E7A"/>
+                </a:solidFill>
+                <a:latin typeface="Arial" pitchFamily="34" charset="0"/>
                 <a:ea typeface="Arial" pitchFamily="34" charset="-122"/>
                 <a:cs typeface="Arial" pitchFamily="34" charset="-120"/>
               </a:rPr>
@@ -4299,22 +4347,15 @@
             <a:avLst/>
           </a:prstGeom>
           <a:solidFill>
-            <a:srgbClr val="2D9C6B"/>
+            <a:srgbClr val="ECC31C"/>
           </a:solidFill>
           <a:ln w="12700">
             <a:solidFill>
-              <a:srgbClr val="2D9C6B"/>
+              <a:srgbClr val="ECC31C"/>
             </a:solidFill>
             <a:prstDash val="solid"/>
           </a:ln>
         </p:spPr>
-        <p:txBody>
-          <a:bodyPr/>
-          <a:lstStyle/>
-          <a:p>
-            <a:endParaRPr lang="he-IL"/>
-          </a:p>
-        </p:txBody>
       </p:sp>
       <p:sp>
         <p:nvSpPr>
@@ -4337,14 +4378,15 @@
           <a:bodyPr wrap="square" lIns="0" tIns="0" rIns="0" bIns="0" rtlCol="0" anchor="t"/>
           <a:lstStyle/>
           <a:p>
-            <a:pPr marL="0" indent="0" algn="r" rtl="1">
+            <a:pPr rtl="1" algn="r" indent="0" marL="0">
               <a:buNone/>
             </a:pPr>
             <a:r>
               <a:rPr lang="en-US" sz="2300" b="1" dirty="0">
                 <a:solidFill>
-                  <a:srgbClr val="FFFFFF"/>
-                </a:solidFill>
+                  <a:srgbClr val="FAF6EE"/>
+                </a:solidFill>
+                <a:latin typeface="Arial" pitchFamily="34" charset="0"/>
                 <a:ea typeface="Arial" pitchFamily="34" charset="-122"/>
                 <a:cs typeface="Arial" pitchFamily="34" charset="-120"/>
               </a:rPr>
@@ -4375,14 +4417,15 @@
           <a:bodyPr wrap="square" lIns="0" tIns="0" rIns="0" bIns="0" rtlCol="0" anchor="t"/>
           <a:lstStyle/>
           <a:p>
-            <a:pPr marL="0" indent="0" algn="r" rtl="1">
+            <a:pPr rtl="1" algn="r" indent="0" marL="0">
               <a:buNone/>
             </a:pPr>
             <a:r>
               <a:rPr lang="en-US" sz="1700" dirty="0">
                 <a:solidFill>
-                  <a:srgbClr val="7FAFC0"/>
-                </a:solidFill>
+                  <a:srgbClr val="9E8E7A"/>
+                </a:solidFill>
+                <a:latin typeface="Arial" pitchFamily="34" charset="0"/>
                 <a:ea typeface="Arial" pitchFamily="34" charset="-122"/>
                 <a:cs typeface="Arial" pitchFamily="34" charset="-120"/>
               </a:rPr>
@@ -4407,22 +4450,15 @@
             <a:avLst/>
           </a:prstGeom>
           <a:solidFill>
-            <a:srgbClr val="2D9C6B"/>
+            <a:srgbClr val="ECC31C"/>
           </a:solidFill>
           <a:ln w="12700">
             <a:solidFill>
-              <a:srgbClr val="2D9C6B"/>
+              <a:srgbClr val="ECC31C"/>
             </a:solidFill>
             <a:prstDash val="solid"/>
           </a:ln>
         </p:spPr>
-        <p:txBody>
-          <a:bodyPr/>
-          <a:lstStyle/>
-          <a:p>
-            <a:endParaRPr lang="he-IL"/>
-          </a:p>
-        </p:txBody>
       </p:sp>
       <p:sp>
         <p:nvSpPr>
@@ -4445,14 +4481,15 @@
           <a:bodyPr wrap="square" lIns="0" tIns="0" rIns="0" bIns="0" rtlCol="0" anchor="t"/>
           <a:lstStyle/>
           <a:p>
-            <a:pPr marL="0" indent="0" algn="r" rtl="1">
+            <a:pPr rtl="1" algn="r" indent="0" marL="0">
               <a:buNone/>
             </a:pPr>
             <a:r>
               <a:rPr lang="en-US" sz="2300" b="1" dirty="0">
                 <a:solidFill>
-                  <a:srgbClr val="FFFFFF"/>
-                </a:solidFill>
+                  <a:srgbClr val="FAF6EE"/>
+                </a:solidFill>
+                <a:latin typeface="Arial" pitchFamily="34" charset="0"/>
                 <a:ea typeface="Arial" pitchFamily="34" charset="-122"/>
                 <a:cs typeface="Arial" pitchFamily="34" charset="-120"/>
               </a:rPr>
@@ -4483,14 +4520,15 @@
           <a:bodyPr wrap="square" lIns="0" tIns="0" rIns="0" bIns="0" rtlCol="0" anchor="t"/>
           <a:lstStyle/>
           <a:p>
-            <a:pPr marL="0" indent="0" algn="r" rtl="1">
+            <a:pPr rtl="1" algn="r" indent="0" marL="0">
               <a:buNone/>
             </a:pPr>
             <a:r>
               <a:rPr lang="en-US" sz="1700" dirty="0">
                 <a:solidFill>
-                  <a:srgbClr val="7FAFC0"/>
-                </a:solidFill>
+                  <a:srgbClr val="9E8E7A"/>
+                </a:solidFill>
+                <a:latin typeface="Arial" pitchFamily="34" charset="0"/>
                 <a:ea typeface="Arial" pitchFamily="34" charset="-122"/>
                 <a:cs typeface="Arial" pitchFamily="34" charset="-120"/>
               </a:rPr>
@@ -4515,22 +4553,15 @@
             <a:avLst/>
           </a:prstGeom>
           <a:solidFill>
-            <a:srgbClr val="0D3020"/>
+            <a:srgbClr val="2A2010"/>
           </a:solidFill>
           <a:ln w="12700">
             <a:solidFill>
-              <a:srgbClr val="0D3020"/>
+              <a:srgbClr val="2A2010"/>
             </a:solidFill>
             <a:prstDash val="solid"/>
           </a:ln>
         </p:spPr>
-        <p:txBody>
-          <a:bodyPr/>
-          <a:lstStyle/>
-          <a:p>
-            <a:endParaRPr lang="he-IL"/>
-          </a:p>
-        </p:txBody>
       </p:sp>
       <p:sp>
         <p:nvSpPr>
@@ -4547,22 +4578,15 @@
             <a:avLst/>
           </a:prstGeom>
           <a:solidFill>
-            <a:srgbClr val="52B788"/>
+            <a:srgbClr val="D4A040"/>
           </a:solidFill>
           <a:ln w="12700">
             <a:solidFill>
-              <a:srgbClr val="52B788"/>
+              <a:srgbClr val="D4A040"/>
             </a:solidFill>
             <a:prstDash val="solid"/>
           </a:ln>
         </p:spPr>
-        <p:txBody>
-          <a:bodyPr/>
-          <a:lstStyle/>
-          <a:p>
-            <a:endParaRPr lang="he-IL"/>
-          </a:p>
-        </p:txBody>
       </p:sp>
       <p:sp>
         <p:nvSpPr>
@@ -4579,22 +4603,15 @@
             <a:avLst/>
           </a:prstGeom>
           <a:solidFill>
-            <a:srgbClr val="52B788"/>
+            <a:srgbClr val="D4A040"/>
           </a:solidFill>
           <a:ln w="12700">
             <a:solidFill>
-              <a:srgbClr val="52B788"/>
+              <a:srgbClr val="D4A040"/>
             </a:solidFill>
             <a:prstDash val="solid"/>
           </a:ln>
         </p:spPr>
-        <p:txBody>
-          <a:bodyPr/>
-          <a:lstStyle/>
-          <a:p>
-            <a:endParaRPr lang="he-IL"/>
-          </a:p>
-        </p:txBody>
       </p:sp>
       <p:sp>
         <p:nvSpPr>
@@ -4617,14 +4634,15 @@
           <a:bodyPr wrap="square" lIns="0" tIns="0" rIns="0" bIns="0" rtlCol="0" anchor="ctr"/>
           <a:lstStyle/>
           <a:p>
-            <a:pPr marL="0" indent="0" algn="r" rtl="1">
+            <a:pPr rtl="1" algn="r" indent="0" marL="0">
               <a:buNone/>
             </a:pPr>
             <a:r>
               <a:rPr lang="en-US" sz="3800" b="1" dirty="0">
                 <a:solidFill>
-                  <a:srgbClr val="95E0BE"/>
-                </a:solidFill>
+                  <a:srgbClr val="F5EDD8"/>
+                </a:solidFill>
+                <a:latin typeface="Arial" pitchFamily="34" charset="0"/>
                 <a:ea typeface="Arial" pitchFamily="34" charset="-122"/>
                 <a:cs typeface="Arial" pitchFamily="34" charset="-120"/>
               </a:rPr>
@@ -4649,29 +4667,22 @@
             <a:avLst/>
           </a:prstGeom>
           <a:solidFill>
-            <a:srgbClr val="0A2C1C"/>
+            <a:srgbClr val="2A2010"/>
           </a:solidFill>
           <a:ln w="15240">
             <a:solidFill>
-              <a:srgbClr val="52B788"/>
+              <a:srgbClr val="D4A040"/>
             </a:solidFill>
             <a:prstDash val="solid"/>
           </a:ln>
           <a:effectLst>
-            <a:outerShdw blurRad="101600" dist="38100" dir="8100000" algn="bl" rotWithShape="0">
+            <a:outerShdw sx="100000" sy="100000" kx="0" ky="0" algn="bl" rotWithShape="0" blurRad="101600" dist="38100" dir="8100000">
               <a:srgbClr val="000000">
                 <a:alpha val="30000"/>
               </a:srgbClr>
             </a:outerShdw>
           </a:effectLst>
         </p:spPr>
-        <p:txBody>
-          <a:bodyPr/>
-          <a:lstStyle/>
-          <a:p>
-            <a:endParaRPr lang="he-IL"/>
-          </a:p>
-        </p:txBody>
       </p:sp>
       <p:sp>
         <p:nvSpPr>
@@ -4688,22 +4699,15 @@
             <a:avLst/>
           </a:prstGeom>
           <a:solidFill>
-            <a:srgbClr val="2D9C6B"/>
+            <a:srgbClr val="ECC31C"/>
           </a:solidFill>
           <a:ln w="25400">
             <a:solidFill>
-              <a:srgbClr val="52B788"/>
+              <a:srgbClr val="D4A040"/>
             </a:solidFill>
             <a:prstDash val="solid"/>
           </a:ln>
         </p:spPr>
-        <p:txBody>
-          <a:bodyPr/>
-          <a:lstStyle/>
-          <a:p>
-            <a:endParaRPr lang="he-IL"/>
-          </a:p>
-        </p:txBody>
       </p:sp>
       <p:sp>
         <p:nvSpPr>
@@ -4726,14 +4730,15 @@
           <a:bodyPr wrap="square" lIns="0" tIns="0" rIns="0" bIns="0" rtlCol="0" anchor="ctr"/>
           <a:lstStyle/>
           <a:p>
-            <a:pPr marL="0" indent="0" algn="ctr" rtl="1">
+            <a:pPr rtl="1" algn="ctr" indent="0" marL="0">
               <a:buNone/>
             </a:pPr>
             <a:r>
               <a:rPr lang="en-US" sz="3000" b="1" dirty="0">
                 <a:solidFill>
-                  <a:srgbClr val="FFFFFF"/>
-                </a:solidFill>
+                  <a:srgbClr val="FAF6EE"/>
+                </a:solidFill>
+                <a:latin typeface="Arial" pitchFamily="34" charset="0"/>
                 <a:ea typeface="Arial" pitchFamily="34" charset="-122"/>
                 <a:cs typeface="Arial" pitchFamily="34" charset="-120"/>
               </a:rPr>
@@ -4764,14 +4769,15 @@
           <a:bodyPr wrap="square" lIns="0" tIns="0" rIns="0" bIns="0" rtlCol="0" anchor="t"/>
           <a:lstStyle/>
           <a:p>
-            <a:pPr marL="0" indent="0" algn="ctr">
+            <a:pPr algn="ctr" indent="0" marL="0">
               <a:buNone/>
             </a:pPr>
             <a:r>
               <a:rPr lang="en-US" sz="2200" b="1" dirty="0">
                 <a:solidFill>
-                  <a:srgbClr val="95E0BE"/>
-                </a:solidFill>
+                  <a:srgbClr val="F5EDD8"/>
+                </a:solidFill>
+                <a:latin typeface="Arial" pitchFamily="34" charset="0"/>
                 <a:ea typeface="Arial" pitchFamily="34" charset="-122"/>
                 <a:cs typeface="Arial" pitchFamily="34" charset="-120"/>
               </a:rPr>
@@ -4802,14 +4808,15 @@
           <a:bodyPr wrap="square" lIns="38100" tIns="38100" rIns="38100" bIns="38100" rtlCol="0" anchor="ctr"/>
           <a:lstStyle/>
           <a:p>
-            <a:pPr marL="0" indent="0" algn="ctr" rtl="1">
+            <a:pPr rtl="1" algn="ctr" indent="0" marL="0">
               <a:buNone/>
             </a:pPr>
             <a:r>
               <a:rPr lang="en-US" sz="2000" dirty="0">
                 <a:solidFill>
-                  <a:srgbClr val="FFFFFF"/>
-                </a:solidFill>
+                  <a:srgbClr val="FAF6EE"/>
+                </a:solidFill>
+                <a:latin typeface="Arial" pitchFamily="34" charset="0"/>
                 <a:ea typeface="Arial" pitchFamily="34" charset="-122"/>
                 <a:cs typeface="Arial" pitchFamily="34" charset="-120"/>
               </a:rPr>
@@ -4818,14 +4825,15 @@
             <a:endParaRPr lang="en-US" sz="2000" dirty="0"/>
           </a:p>
           <a:p>
-            <a:pPr marL="0" indent="0" algn="ctr" rtl="1">
+            <a:pPr rtl="1" algn="ctr" indent="0" marL="0">
               <a:buNone/>
             </a:pPr>
             <a:r>
               <a:rPr lang="en-US" sz="2000" dirty="0">
                 <a:solidFill>
-                  <a:srgbClr val="FFFFFF"/>
-                </a:solidFill>
+                  <a:srgbClr val="FAF6EE"/>
+                </a:solidFill>
+                <a:latin typeface="Arial" pitchFamily="34" charset="0"/>
                 <a:ea typeface="Arial" pitchFamily="34" charset="-122"/>
                 <a:cs typeface="Arial" pitchFamily="34" charset="-120"/>
               </a:rPr>
@@ -4834,14 +4842,15 @@
             <a:endParaRPr lang="en-US" sz="2000" dirty="0"/>
           </a:p>
           <a:p>
-            <a:pPr marL="0" indent="0" algn="ctr" rtl="1">
+            <a:pPr rtl="1" algn="ctr" indent="0" marL="0">
               <a:buNone/>
             </a:pPr>
             <a:r>
               <a:rPr lang="en-US" sz="2000" dirty="0">
                 <a:solidFill>
-                  <a:srgbClr val="FFFFFF"/>
-                </a:solidFill>
+                  <a:srgbClr val="FAF6EE"/>
+                </a:solidFill>
+                <a:latin typeface="Arial" pitchFamily="34" charset="0"/>
                 <a:ea typeface="Arial" pitchFamily="34" charset="-122"/>
                 <a:cs typeface="Arial" pitchFamily="34" charset="-120"/>
               </a:rPr>
@@ -4868,18 +4877,11 @@
           <a:noFill/>
           <a:ln w="50800">
             <a:solidFill>
-              <a:srgbClr val="95E0BE"/>
+              <a:srgbClr val="F5EDD8"/>
             </a:solidFill>
             <a:prstDash val="solid"/>
           </a:ln>
         </p:spPr>
-        <p:txBody>
-          <a:bodyPr/>
-          <a:lstStyle/>
-          <a:p>
-            <a:endParaRPr lang="he-IL"/>
-          </a:p>
-        </p:txBody>
       </p:sp>
       <p:sp>
         <p:nvSpPr>
@@ -4896,29 +4898,22 @@
             <a:avLst/>
           </a:prstGeom>
           <a:solidFill>
-            <a:srgbClr val="0A2C1C"/>
+            <a:srgbClr val="2A2010"/>
           </a:solidFill>
           <a:ln w="15240">
             <a:solidFill>
-              <a:srgbClr val="52B788"/>
+              <a:srgbClr val="D4A040"/>
             </a:solidFill>
             <a:prstDash val="solid"/>
           </a:ln>
           <a:effectLst>
-            <a:outerShdw blurRad="101600" dist="38100" dir="8100000" algn="bl" rotWithShape="0">
+            <a:outerShdw sx="100000" sy="100000" kx="0" ky="0" algn="bl" rotWithShape="0" blurRad="101600" dist="38100" dir="8100000">
               <a:srgbClr val="000000">
                 <a:alpha val="30000"/>
               </a:srgbClr>
             </a:outerShdw>
           </a:effectLst>
         </p:spPr>
-        <p:txBody>
-          <a:bodyPr/>
-          <a:lstStyle/>
-          <a:p>
-            <a:endParaRPr lang="he-IL"/>
-          </a:p>
-        </p:txBody>
       </p:sp>
       <p:sp>
         <p:nvSpPr>
@@ -4935,22 +4930,15 @@
             <a:avLst/>
           </a:prstGeom>
           <a:solidFill>
-            <a:srgbClr val="2D9C6B"/>
+            <a:srgbClr val="ECC31C"/>
           </a:solidFill>
           <a:ln w="25400">
             <a:solidFill>
-              <a:srgbClr val="52B788"/>
+              <a:srgbClr val="D4A040"/>
             </a:solidFill>
             <a:prstDash val="solid"/>
           </a:ln>
         </p:spPr>
-        <p:txBody>
-          <a:bodyPr/>
-          <a:lstStyle/>
-          <a:p>
-            <a:endParaRPr lang="he-IL"/>
-          </a:p>
-        </p:txBody>
       </p:sp>
       <p:sp>
         <p:nvSpPr>
@@ -4973,14 +4961,15 @@
           <a:bodyPr wrap="square" lIns="0" tIns="0" rIns="0" bIns="0" rtlCol="0" anchor="ctr"/>
           <a:lstStyle/>
           <a:p>
-            <a:pPr marL="0" indent="0" algn="ctr" rtl="1">
+            <a:pPr rtl="1" algn="ctr" indent="0" marL="0">
               <a:buNone/>
             </a:pPr>
             <a:r>
               <a:rPr lang="en-US" sz="3000" b="1" dirty="0">
                 <a:solidFill>
-                  <a:srgbClr val="FFFFFF"/>
-                </a:solidFill>
+                  <a:srgbClr val="FAF6EE"/>
+                </a:solidFill>
+                <a:latin typeface="Arial" pitchFamily="34" charset="0"/>
                 <a:ea typeface="Arial" pitchFamily="34" charset="-122"/>
                 <a:cs typeface="Arial" pitchFamily="34" charset="-120"/>
               </a:rPr>
@@ -5011,14 +5000,15 @@
           <a:bodyPr wrap="square" lIns="0" tIns="0" rIns="0" bIns="0" rtlCol="0" anchor="t"/>
           <a:lstStyle/>
           <a:p>
-            <a:pPr marL="0" indent="0" algn="ctr">
+            <a:pPr algn="ctr" indent="0" marL="0">
               <a:buNone/>
             </a:pPr>
             <a:r>
               <a:rPr lang="en-US" sz="2200" b="1" dirty="0">
                 <a:solidFill>
-                  <a:srgbClr val="95E0BE"/>
-                </a:solidFill>
+                  <a:srgbClr val="F5EDD8"/>
+                </a:solidFill>
+                <a:latin typeface="Arial" pitchFamily="34" charset="0"/>
                 <a:ea typeface="Arial" pitchFamily="34" charset="-122"/>
                 <a:cs typeface="Arial" pitchFamily="34" charset="-120"/>
               </a:rPr>
@@ -5049,14 +5039,15 @@
           <a:bodyPr wrap="square" lIns="38100" tIns="38100" rIns="38100" bIns="38100" rtlCol="0" anchor="ctr"/>
           <a:lstStyle/>
           <a:p>
-            <a:pPr marL="0" indent="0" algn="ctr" rtl="1">
+            <a:pPr rtl="1" algn="ctr" indent="0" marL="0">
               <a:buNone/>
             </a:pPr>
             <a:r>
               <a:rPr lang="en-US" sz="2000" dirty="0">
                 <a:solidFill>
-                  <a:srgbClr val="FFFFFF"/>
-                </a:solidFill>
+                  <a:srgbClr val="FAF6EE"/>
+                </a:solidFill>
+                <a:latin typeface="Arial" pitchFamily="34" charset="0"/>
                 <a:ea typeface="Arial" pitchFamily="34" charset="-122"/>
                 <a:cs typeface="Arial" pitchFamily="34" charset="-120"/>
               </a:rPr>
@@ -5065,14 +5056,15 @@
             <a:endParaRPr lang="en-US" sz="2000" dirty="0"/>
           </a:p>
           <a:p>
-            <a:pPr marL="0" indent="0" algn="ctr" rtl="1">
+            <a:pPr rtl="1" algn="ctr" indent="0" marL="0">
               <a:buNone/>
             </a:pPr>
             <a:r>
               <a:rPr lang="en-US" sz="2000" dirty="0">
                 <a:solidFill>
-                  <a:srgbClr val="FFFFFF"/>
-                </a:solidFill>
+                  <a:srgbClr val="FAF6EE"/>
+                </a:solidFill>
+                <a:latin typeface="Arial" pitchFamily="34" charset="0"/>
                 <a:ea typeface="Arial" pitchFamily="34" charset="-122"/>
                 <a:cs typeface="Arial" pitchFamily="34" charset="-120"/>
               </a:rPr>
@@ -5081,14 +5073,15 @@
             <a:endParaRPr lang="en-US" sz="2000" dirty="0"/>
           </a:p>
           <a:p>
-            <a:pPr marL="0" indent="0" algn="ctr" rtl="1">
+            <a:pPr rtl="1" algn="ctr" indent="0" marL="0">
               <a:buNone/>
             </a:pPr>
             <a:r>
               <a:rPr lang="en-US" sz="2000" dirty="0">
                 <a:solidFill>
-                  <a:srgbClr val="FFFFFF"/>
-                </a:solidFill>
+                  <a:srgbClr val="FAF6EE"/>
+                </a:solidFill>
+                <a:latin typeface="Arial" pitchFamily="34" charset="0"/>
                 <a:ea typeface="Arial" pitchFamily="34" charset="-122"/>
                 <a:cs typeface="Arial" pitchFamily="34" charset="-120"/>
               </a:rPr>
@@ -5115,18 +5108,11 @@
           <a:noFill/>
           <a:ln w="50800">
             <a:solidFill>
-              <a:srgbClr val="95E0BE"/>
+              <a:srgbClr val="F5EDD8"/>
             </a:solidFill>
             <a:prstDash val="solid"/>
           </a:ln>
         </p:spPr>
-        <p:txBody>
-          <a:bodyPr/>
-          <a:lstStyle/>
-          <a:p>
-            <a:endParaRPr lang="he-IL"/>
-          </a:p>
-        </p:txBody>
       </p:sp>
       <p:sp>
         <p:nvSpPr>
@@ -5143,29 +5129,22 @@
             <a:avLst/>
           </a:prstGeom>
           <a:solidFill>
-            <a:srgbClr val="0A2C1C"/>
+            <a:srgbClr val="2A2010"/>
           </a:solidFill>
           <a:ln w="15240">
             <a:solidFill>
-              <a:srgbClr val="52B788"/>
+              <a:srgbClr val="D4A040"/>
             </a:solidFill>
             <a:prstDash val="solid"/>
           </a:ln>
           <a:effectLst>
-            <a:outerShdw blurRad="101600" dist="38100" dir="8100000" algn="bl" rotWithShape="0">
+            <a:outerShdw sx="100000" sy="100000" kx="0" ky="0" algn="bl" rotWithShape="0" blurRad="101600" dist="38100" dir="8100000">
               <a:srgbClr val="000000">
                 <a:alpha val="30000"/>
               </a:srgbClr>
             </a:outerShdw>
           </a:effectLst>
         </p:spPr>
-        <p:txBody>
-          <a:bodyPr/>
-          <a:lstStyle/>
-          <a:p>
-            <a:endParaRPr lang="he-IL"/>
-          </a:p>
-        </p:txBody>
       </p:sp>
       <p:sp>
         <p:nvSpPr>
@@ -5182,22 +5161,15 @@
             <a:avLst/>
           </a:prstGeom>
           <a:solidFill>
-            <a:srgbClr val="2D9C6B"/>
+            <a:srgbClr val="ECC31C"/>
           </a:solidFill>
           <a:ln w="25400">
             <a:solidFill>
-              <a:srgbClr val="52B788"/>
+              <a:srgbClr val="D4A040"/>
             </a:solidFill>
             <a:prstDash val="solid"/>
           </a:ln>
         </p:spPr>
-        <p:txBody>
-          <a:bodyPr/>
-          <a:lstStyle/>
-          <a:p>
-            <a:endParaRPr lang="he-IL"/>
-          </a:p>
-        </p:txBody>
       </p:sp>
       <p:sp>
         <p:nvSpPr>
@@ -5220,14 +5192,15 @@
           <a:bodyPr wrap="square" lIns="0" tIns="0" rIns="0" bIns="0" rtlCol="0" anchor="ctr"/>
           <a:lstStyle/>
           <a:p>
-            <a:pPr marL="0" indent="0" algn="ctr" rtl="1">
+            <a:pPr rtl="1" algn="ctr" indent="0" marL="0">
               <a:buNone/>
             </a:pPr>
             <a:r>
               <a:rPr lang="en-US" sz="3000" b="1" dirty="0">
                 <a:solidFill>
-                  <a:srgbClr val="FFFFFF"/>
-                </a:solidFill>
+                  <a:srgbClr val="FAF6EE"/>
+                </a:solidFill>
+                <a:latin typeface="Arial" pitchFamily="34" charset="0"/>
                 <a:ea typeface="Arial" pitchFamily="34" charset="-122"/>
                 <a:cs typeface="Arial" pitchFamily="34" charset="-120"/>
               </a:rPr>
@@ -5258,14 +5231,15 @@
           <a:bodyPr wrap="square" lIns="0" tIns="0" rIns="0" bIns="0" rtlCol="0" anchor="t"/>
           <a:lstStyle/>
           <a:p>
-            <a:pPr marL="0" indent="0" algn="ctr">
+            <a:pPr algn="ctr" indent="0" marL="0">
               <a:buNone/>
             </a:pPr>
             <a:r>
               <a:rPr lang="en-US" sz="2200" b="1" dirty="0">
                 <a:solidFill>
-                  <a:srgbClr val="95E0BE"/>
-                </a:solidFill>
+                  <a:srgbClr val="F5EDD8"/>
+                </a:solidFill>
+                <a:latin typeface="Arial" pitchFamily="34" charset="0"/>
                 <a:ea typeface="Arial" pitchFamily="34" charset="-122"/>
                 <a:cs typeface="Arial" pitchFamily="34" charset="-120"/>
               </a:rPr>
@@ -5296,14 +5270,15 @@
           <a:bodyPr wrap="square" lIns="38100" tIns="38100" rIns="38100" bIns="38100" rtlCol="0" anchor="ctr"/>
           <a:lstStyle/>
           <a:p>
-            <a:pPr marL="0" indent="0" algn="ctr" rtl="1">
+            <a:pPr rtl="1" algn="ctr" indent="0" marL="0">
               <a:buNone/>
             </a:pPr>
             <a:r>
               <a:rPr lang="en-US" sz="2000" dirty="0">
                 <a:solidFill>
-                  <a:srgbClr val="FFFFFF"/>
-                </a:solidFill>
+                  <a:srgbClr val="FAF6EE"/>
+                </a:solidFill>
+                <a:latin typeface="Arial" pitchFamily="34" charset="0"/>
                 <a:ea typeface="Arial" pitchFamily="34" charset="-122"/>
                 <a:cs typeface="Arial" pitchFamily="34" charset="-120"/>
               </a:rPr>
@@ -5312,14 +5287,15 @@
             <a:endParaRPr lang="en-US" sz="2000" dirty="0"/>
           </a:p>
           <a:p>
-            <a:pPr marL="0" indent="0" algn="ctr" rtl="1">
+            <a:pPr rtl="1" algn="ctr" indent="0" marL="0">
               <a:buNone/>
             </a:pPr>
             <a:r>
               <a:rPr lang="en-US" sz="2000" dirty="0">
                 <a:solidFill>
-                  <a:srgbClr val="FFFFFF"/>
-                </a:solidFill>
+                  <a:srgbClr val="FAF6EE"/>
+                </a:solidFill>
+                <a:latin typeface="Arial" pitchFamily="34" charset="0"/>
                 <a:ea typeface="Arial" pitchFamily="34" charset="-122"/>
                 <a:cs typeface="Arial" pitchFamily="34" charset="-120"/>
               </a:rPr>
@@ -5328,14 +5304,15 @@
             <a:endParaRPr lang="en-US" sz="2000" dirty="0"/>
           </a:p>
           <a:p>
-            <a:pPr marL="0" indent="0" algn="ctr" rtl="1">
+            <a:pPr rtl="1" algn="ctr" indent="0" marL="0">
               <a:buNone/>
             </a:pPr>
             <a:r>
               <a:rPr lang="en-US" sz="2000" dirty="0">
                 <a:solidFill>
-                  <a:srgbClr val="FFFFFF"/>
-                </a:solidFill>
+                  <a:srgbClr val="FAF6EE"/>
+                </a:solidFill>
+                <a:latin typeface="Arial" pitchFamily="34" charset="0"/>
                 <a:ea typeface="Arial" pitchFamily="34" charset="-122"/>
                 <a:cs typeface="Arial" pitchFamily="34" charset="-120"/>
               </a:rPr>
@@ -5362,18 +5339,11 @@
           <a:noFill/>
           <a:ln w="50800">
             <a:solidFill>
-              <a:srgbClr val="95E0BE"/>
+              <a:srgbClr val="F5EDD8"/>
             </a:solidFill>
             <a:prstDash val="solid"/>
           </a:ln>
         </p:spPr>
-        <p:txBody>
-          <a:bodyPr/>
-          <a:lstStyle/>
-          <a:p>
-            <a:endParaRPr lang="he-IL"/>
-          </a:p>
-        </p:txBody>
       </p:sp>
       <p:sp>
         <p:nvSpPr>
@@ -5390,29 +5360,22 @@
             <a:avLst/>
           </a:prstGeom>
           <a:solidFill>
-            <a:srgbClr val="0A2C1C"/>
+            <a:srgbClr val="2A2010"/>
           </a:solidFill>
           <a:ln w="15240">
             <a:solidFill>
-              <a:srgbClr val="52B788"/>
+              <a:srgbClr val="D4A040"/>
             </a:solidFill>
             <a:prstDash val="solid"/>
           </a:ln>
           <a:effectLst>
-            <a:outerShdw blurRad="101600" dist="38100" dir="8100000" algn="bl" rotWithShape="0">
+            <a:outerShdw sx="100000" sy="100000" kx="0" ky="0" algn="bl" rotWithShape="0" blurRad="101600" dist="38100" dir="8100000">
               <a:srgbClr val="000000">
                 <a:alpha val="30000"/>
               </a:srgbClr>
             </a:outerShdw>
           </a:effectLst>
         </p:spPr>
-        <p:txBody>
-          <a:bodyPr/>
-          <a:lstStyle/>
-          <a:p>
-            <a:endParaRPr lang="he-IL"/>
-          </a:p>
-        </p:txBody>
       </p:sp>
       <p:sp>
         <p:nvSpPr>
@@ -5429,22 +5392,15 @@
             <a:avLst/>
           </a:prstGeom>
           <a:solidFill>
-            <a:srgbClr val="2D9C6B"/>
+            <a:srgbClr val="ECC31C"/>
           </a:solidFill>
           <a:ln w="25400">
             <a:solidFill>
-              <a:srgbClr val="52B788"/>
+              <a:srgbClr val="D4A040"/>
             </a:solidFill>
             <a:prstDash val="solid"/>
           </a:ln>
         </p:spPr>
-        <p:txBody>
-          <a:bodyPr/>
-          <a:lstStyle/>
-          <a:p>
-            <a:endParaRPr lang="he-IL"/>
-          </a:p>
-        </p:txBody>
       </p:sp>
       <p:sp>
         <p:nvSpPr>
@@ -5467,14 +5423,15 @@
           <a:bodyPr wrap="square" lIns="0" tIns="0" rIns="0" bIns="0" rtlCol="0" anchor="ctr"/>
           <a:lstStyle/>
           <a:p>
-            <a:pPr marL="0" indent="0" algn="ctr" rtl="1">
+            <a:pPr rtl="1" algn="ctr" indent="0" marL="0">
               <a:buNone/>
             </a:pPr>
             <a:r>
               <a:rPr lang="en-US" sz="3000" b="1" dirty="0">
                 <a:solidFill>
-                  <a:srgbClr val="FFFFFF"/>
-                </a:solidFill>
+                  <a:srgbClr val="FAF6EE"/>
+                </a:solidFill>
+                <a:latin typeface="Arial" pitchFamily="34" charset="0"/>
                 <a:ea typeface="Arial" pitchFamily="34" charset="-122"/>
                 <a:cs typeface="Arial" pitchFamily="34" charset="-120"/>
               </a:rPr>
@@ -5505,14 +5462,15 @@
           <a:bodyPr wrap="square" lIns="0" tIns="0" rIns="0" bIns="0" rtlCol="0" anchor="t"/>
           <a:lstStyle/>
           <a:p>
-            <a:pPr marL="0" indent="0" algn="ctr">
+            <a:pPr algn="ctr" indent="0" marL="0">
               <a:buNone/>
             </a:pPr>
             <a:r>
               <a:rPr lang="en-US" sz="2200" b="1" dirty="0">
                 <a:solidFill>
-                  <a:srgbClr val="95E0BE"/>
-                </a:solidFill>
+                  <a:srgbClr val="F5EDD8"/>
+                </a:solidFill>
+                <a:latin typeface="Arial" pitchFamily="34" charset="0"/>
                 <a:ea typeface="Arial" pitchFamily="34" charset="-122"/>
                 <a:cs typeface="Arial" pitchFamily="34" charset="-120"/>
               </a:rPr>
@@ -5543,14 +5501,15 @@
           <a:bodyPr wrap="square" lIns="38100" tIns="38100" rIns="38100" bIns="38100" rtlCol="0" anchor="ctr"/>
           <a:lstStyle/>
           <a:p>
-            <a:pPr marL="0" indent="0" algn="ctr" rtl="1">
+            <a:pPr rtl="1" algn="ctr" indent="0" marL="0">
               <a:buNone/>
             </a:pPr>
             <a:r>
               <a:rPr lang="en-US" sz="2000" dirty="0">
                 <a:solidFill>
-                  <a:srgbClr val="FFFFFF"/>
-                </a:solidFill>
+                  <a:srgbClr val="FAF6EE"/>
+                </a:solidFill>
+                <a:latin typeface="Arial" pitchFamily="34" charset="0"/>
                 <a:ea typeface="Arial" pitchFamily="34" charset="-122"/>
                 <a:cs typeface="Arial" pitchFamily="34" charset="-120"/>
               </a:rPr>
@@ -5559,14 +5518,15 @@
             <a:endParaRPr lang="en-US" sz="2000" dirty="0"/>
           </a:p>
           <a:p>
-            <a:pPr marL="0" indent="0" algn="ctr" rtl="1">
+            <a:pPr rtl="1" algn="ctr" indent="0" marL="0">
               <a:buNone/>
             </a:pPr>
             <a:r>
               <a:rPr lang="en-US" sz="2000" dirty="0">
                 <a:solidFill>
-                  <a:srgbClr val="FFFFFF"/>
-                </a:solidFill>
+                  <a:srgbClr val="FAF6EE"/>
+                </a:solidFill>
+                <a:latin typeface="Arial" pitchFamily="34" charset="0"/>
                 <a:ea typeface="Arial" pitchFamily="34" charset="-122"/>
                 <a:cs typeface="Arial" pitchFamily="34" charset="-120"/>
               </a:rPr>
@@ -5575,14 +5535,15 @@
             <a:endParaRPr lang="en-US" sz="2000" dirty="0"/>
           </a:p>
           <a:p>
-            <a:pPr marL="0" indent="0" algn="ctr" rtl="1">
+            <a:pPr rtl="1" algn="ctr" indent="0" marL="0">
               <a:buNone/>
             </a:pPr>
             <a:r>
               <a:rPr lang="en-US" sz="2000" dirty="0">
                 <a:solidFill>
-                  <a:srgbClr val="FFFFFF"/>
-                </a:solidFill>
+                  <a:srgbClr val="FAF6EE"/>
+                </a:solidFill>
+                <a:latin typeface="Arial" pitchFamily="34" charset="0"/>
                 <a:ea typeface="Arial" pitchFamily="34" charset="-122"/>
                 <a:cs typeface="Arial" pitchFamily="34" charset="-120"/>
               </a:rPr>
@@ -5609,18 +5570,11 @@
           <a:noFill/>
           <a:ln w="50800">
             <a:solidFill>
-              <a:srgbClr val="95E0BE"/>
+              <a:srgbClr val="F5EDD8"/>
             </a:solidFill>
             <a:prstDash val="solid"/>
           </a:ln>
         </p:spPr>
-        <p:txBody>
-          <a:bodyPr/>
-          <a:lstStyle/>
-          <a:p>
-            <a:endParaRPr lang="he-IL"/>
-          </a:p>
-        </p:txBody>
       </p:sp>
       <p:sp>
         <p:nvSpPr>
@@ -5637,29 +5591,22 @@
             <a:avLst/>
           </a:prstGeom>
           <a:solidFill>
-            <a:srgbClr val="0A2C1C"/>
+            <a:srgbClr val="2A2010"/>
           </a:solidFill>
           <a:ln w="15240">
             <a:solidFill>
-              <a:srgbClr val="52B788"/>
+              <a:srgbClr val="D4A040"/>
             </a:solidFill>
             <a:prstDash val="solid"/>
           </a:ln>
           <a:effectLst>
-            <a:outerShdw blurRad="101600" dist="38100" dir="8100000" algn="bl" rotWithShape="0">
+            <a:outerShdw sx="100000" sy="100000" kx="0" ky="0" algn="bl" rotWithShape="0" blurRad="101600" dist="38100" dir="8100000">
               <a:srgbClr val="000000">
                 <a:alpha val="30000"/>
               </a:srgbClr>
             </a:outerShdw>
           </a:effectLst>
         </p:spPr>
-        <p:txBody>
-          <a:bodyPr/>
-          <a:lstStyle/>
-          <a:p>
-            <a:endParaRPr lang="he-IL"/>
-          </a:p>
-        </p:txBody>
       </p:sp>
       <p:sp>
         <p:nvSpPr>
@@ -5676,22 +5623,15 @@
             <a:avLst/>
           </a:prstGeom>
           <a:solidFill>
-            <a:srgbClr val="2D9C6B"/>
+            <a:srgbClr val="ECC31C"/>
           </a:solidFill>
           <a:ln w="25400">
             <a:solidFill>
-              <a:srgbClr val="52B788"/>
+              <a:srgbClr val="D4A040"/>
             </a:solidFill>
             <a:prstDash val="solid"/>
           </a:ln>
         </p:spPr>
-        <p:txBody>
-          <a:bodyPr/>
-          <a:lstStyle/>
-          <a:p>
-            <a:endParaRPr lang="he-IL"/>
-          </a:p>
-        </p:txBody>
       </p:sp>
       <p:sp>
         <p:nvSpPr>
@@ -5714,14 +5654,15 @@
           <a:bodyPr wrap="square" lIns="0" tIns="0" rIns="0" bIns="0" rtlCol="0" anchor="ctr"/>
           <a:lstStyle/>
           <a:p>
-            <a:pPr marL="0" indent="0" algn="ctr" rtl="1">
+            <a:pPr rtl="1" algn="ctr" indent="0" marL="0">
               <a:buNone/>
             </a:pPr>
             <a:r>
               <a:rPr lang="en-US" sz="3000" b="1" dirty="0">
                 <a:solidFill>
-                  <a:srgbClr val="FFFFFF"/>
-                </a:solidFill>
+                  <a:srgbClr val="FAF6EE"/>
+                </a:solidFill>
+                <a:latin typeface="Arial" pitchFamily="34" charset="0"/>
                 <a:ea typeface="Arial" pitchFamily="34" charset="-122"/>
                 <a:cs typeface="Arial" pitchFamily="34" charset="-120"/>
               </a:rPr>
@@ -5752,14 +5693,15 @@
           <a:bodyPr wrap="square" lIns="0" tIns="0" rIns="0" bIns="0" rtlCol="0" anchor="t"/>
           <a:lstStyle/>
           <a:p>
-            <a:pPr marL="0" indent="0" algn="ctr">
+            <a:pPr algn="ctr" indent="0" marL="0">
               <a:buNone/>
             </a:pPr>
             <a:r>
               <a:rPr lang="en-US" sz="2200" b="1" dirty="0">
                 <a:solidFill>
-                  <a:srgbClr val="95E0BE"/>
-                </a:solidFill>
+                  <a:srgbClr val="F5EDD8"/>
+                </a:solidFill>
+                <a:latin typeface="Arial" pitchFamily="34" charset="0"/>
                 <a:ea typeface="Arial" pitchFamily="34" charset="-122"/>
                 <a:cs typeface="Arial" pitchFamily="34" charset="-120"/>
               </a:rPr>
@@ -5790,14 +5732,15 @@
           <a:bodyPr wrap="square" lIns="38100" tIns="38100" rIns="38100" bIns="38100" rtlCol="0" anchor="ctr"/>
           <a:lstStyle/>
           <a:p>
-            <a:pPr marL="0" indent="0" algn="ctr" rtl="1">
+            <a:pPr rtl="1" algn="ctr" indent="0" marL="0">
               <a:buNone/>
             </a:pPr>
             <a:r>
               <a:rPr lang="en-US" sz="2000" dirty="0">
                 <a:solidFill>
-                  <a:srgbClr val="FFFFFF"/>
-                </a:solidFill>
+                  <a:srgbClr val="FAF6EE"/>
+                </a:solidFill>
+                <a:latin typeface="Arial" pitchFamily="34" charset="0"/>
                 <a:ea typeface="Arial" pitchFamily="34" charset="-122"/>
                 <a:cs typeface="Arial" pitchFamily="34" charset="-120"/>
               </a:rPr>
@@ -5806,14 +5749,15 @@
             <a:endParaRPr lang="en-US" sz="2000" dirty="0"/>
           </a:p>
           <a:p>
-            <a:pPr marL="0" indent="0" algn="ctr" rtl="1">
+            <a:pPr rtl="1" algn="ctr" indent="0" marL="0">
               <a:buNone/>
             </a:pPr>
             <a:r>
               <a:rPr lang="en-US" sz="2000" dirty="0">
                 <a:solidFill>
-                  <a:srgbClr val="FFFFFF"/>
-                </a:solidFill>
+                  <a:srgbClr val="FAF6EE"/>
+                </a:solidFill>
+                <a:latin typeface="Arial" pitchFamily="34" charset="0"/>
                 <a:ea typeface="Arial" pitchFamily="34" charset="-122"/>
                 <a:cs typeface="Arial" pitchFamily="34" charset="-120"/>
               </a:rPr>
@@ -5822,14 +5766,15 @@
             <a:endParaRPr lang="en-US" sz="2000" dirty="0"/>
           </a:p>
           <a:p>
-            <a:pPr marL="0" indent="0" algn="ctr" rtl="1">
+            <a:pPr rtl="1" algn="ctr" indent="0" marL="0">
               <a:buNone/>
             </a:pPr>
             <a:r>
               <a:rPr lang="en-US" sz="2000" dirty="0">
                 <a:solidFill>
-                  <a:srgbClr val="FFFFFF"/>
-                </a:solidFill>
+                  <a:srgbClr val="FAF6EE"/>
+                </a:solidFill>
+                <a:latin typeface="Arial" pitchFamily="34" charset="0"/>
                 <a:ea typeface="Arial" pitchFamily="34" charset="-122"/>
                 <a:cs typeface="Arial" pitchFamily="34" charset="-120"/>
               </a:rPr>
@@ -5854,29 +5799,22 @@
             <a:avLst/>
           </a:prstGeom>
           <a:solidFill>
-            <a:srgbClr val="102030"/>
+            <a:srgbClr val="241D16"/>
           </a:solidFill>
           <a:ln w="15240">
             <a:solidFill>
-              <a:srgbClr val="2D9C6B"/>
+              <a:srgbClr val="ECC31C"/>
             </a:solidFill>
             <a:prstDash val="solid"/>
           </a:ln>
           <a:effectLst>
-            <a:outerShdw blurRad="101600" dist="38100" dir="8100000" algn="bl" rotWithShape="0">
+            <a:outerShdw sx="100000" sy="100000" kx="0" ky="0" algn="bl" rotWithShape="0" blurRad="101600" dist="38100" dir="8100000">
               <a:srgbClr val="000000">
                 <a:alpha val="30000"/>
               </a:srgbClr>
             </a:outerShdw>
           </a:effectLst>
         </p:spPr>
-        <p:txBody>
-          <a:bodyPr/>
-          <a:lstStyle/>
-          <a:p>
-            <a:endParaRPr lang="he-IL"/>
-          </a:p>
-        </p:txBody>
       </p:sp>
       <p:sp>
         <p:nvSpPr>
@@ -5899,14 +5837,15 @@
           <a:bodyPr wrap="square" lIns="0" tIns="0" rIns="0" bIns="0" rtlCol="0" anchor="ctr"/>
           <a:lstStyle/>
           <a:p>
-            <a:pPr marL="0" indent="0" algn="r" rtl="1">
+            <a:pPr rtl="1" algn="r" indent="0" marL="0">
               <a:buNone/>
             </a:pPr>
             <a:r>
               <a:rPr lang="en-US" sz="3800" b="1" dirty="0">
                 <a:solidFill>
-                  <a:srgbClr val="52B788"/>
-                </a:solidFill>
+                  <a:srgbClr val="D4A040"/>
+                </a:solidFill>
+                <a:latin typeface="Arial" pitchFamily="34" charset="0"/>
                 <a:ea typeface="Arial" pitchFamily="34" charset="-122"/>
                 <a:cs typeface="Arial" pitchFamily="34" charset="-120"/>
               </a:rPr>
@@ -5931,22 +5870,15 @@
             <a:avLst/>
           </a:prstGeom>
           <a:solidFill>
-            <a:srgbClr val="2D9C6B"/>
+            <a:srgbClr val="ECC31C"/>
           </a:solidFill>
           <a:ln w="12700">
             <a:solidFill>
-              <a:srgbClr val="2D9C6B"/>
+              <a:srgbClr val="ECC31C"/>
             </a:solidFill>
             <a:prstDash val="solid"/>
           </a:ln>
         </p:spPr>
-        <p:txBody>
-          <a:bodyPr/>
-          <a:lstStyle/>
-          <a:p>
-            <a:endParaRPr lang="he-IL"/>
-          </a:p>
-        </p:txBody>
       </p:sp>
       <p:sp>
         <p:nvSpPr>
@@ -5969,14 +5901,15 @@
           <a:bodyPr wrap="square" lIns="0" tIns="0" rIns="0" bIns="0" rtlCol="0" anchor="ctr"/>
           <a:lstStyle/>
           <a:p>
-            <a:pPr marL="0" indent="0" algn="ctr" rtl="1">
+            <a:pPr rtl="1" algn="ctr" indent="0" marL="0">
               <a:buNone/>
             </a:pPr>
             <a:r>
               <a:rPr lang="en-US" sz="2000" b="1" dirty="0">
                 <a:solidFill>
-                  <a:srgbClr val="FFFFFF"/>
-                </a:solidFill>
+                  <a:srgbClr val="FAF6EE"/>
+                </a:solidFill>
+                <a:latin typeface="Arial" pitchFamily="34" charset="0"/>
                 <a:ea typeface="Arial" pitchFamily="34" charset="-122"/>
                 <a:cs typeface="Arial" pitchFamily="34" charset="-120"/>
               </a:rPr>
@@ -6007,14 +5940,15 @@
           <a:bodyPr wrap="square" lIns="38100" tIns="38100" rIns="38100" bIns="38100" rtlCol="0" anchor="ctr"/>
           <a:lstStyle/>
           <a:p>
-            <a:pPr marL="0" indent="0" algn="r" rtl="1">
+            <a:pPr rtl="1" algn="r" indent="0" marL="0">
               <a:buNone/>
             </a:pPr>
             <a:r>
               <a:rPr lang="en-US" sz="2100" dirty="0">
                 <a:solidFill>
-                  <a:srgbClr val="FFFFFF"/>
-                </a:solidFill>
+                  <a:srgbClr val="FAF6EE"/>
+                </a:solidFill>
+                <a:latin typeface="Arial" pitchFamily="34" charset="0"/>
                 <a:ea typeface="Arial" pitchFamily="34" charset="-122"/>
                 <a:cs typeface="Arial" pitchFamily="34" charset="-120"/>
               </a:rPr>
@@ -6039,22 +5973,15 @@
             <a:avLst/>
           </a:prstGeom>
           <a:solidFill>
-            <a:srgbClr val="2D9C6B"/>
+            <a:srgbClr val="ECC31C"/>
           </a:solidFill>
           <a:ln w="12700">
             <a:solidFill>
-              <a:srgbClr val="2D9C6B"/>
+              <a:srgbClr val="ECC31C"/>
             </a:solidFill>
             <a:prstDash val="solid"/>
           </a:ln>
         </p:spPr>
-        <p:txBody>
-          <a:bodyPr/>
-          <a:lstStyle/>
-          <a:p>
-            <a:endParaRPr lang="he-IL"/>
-          </a:p>
-        </p:txBody>
       </p:sp>
       <p:sp>
         <p:nvSpPr>
@@ -6077,14 +6004,15 @@
           <a:bodyPr wrap="square" lIns="0" tIns="0" rIns="0" bIns="0" rtlCol="0" anchor="ctr"/>
           <a:lstStyle/>
           <a:p>
-            <a:pPr marL="0" indent="0" algn="ctr" rtl="1">
+            <a:pPr rtl="1" algn="ctr" indent="0" marL="0">
               <a:buNone/>
             </a:pPr>
             <a:r>
               <a:rPr lang="en-US" sz="2000" b="1" dirty="0">
                 <a:solidFill>
-                  <a:srgbClr val="FFFFFF"/>
-                </a:solidFill>
+                  <a:srgbClr val="FAF6EE"/>
+                </a:solidFill>
+                <a:latin typeface="Arial" pitchFamily="34" charset="0"/>
                 <a:ea typeface="Arial" pitchFamily="34" charset="-122"/>
                 <a:cs typeface="Arial" pitchFamily="34" charset="-120"/>
               </a:rPr>
@@ -6115,14 +6043,15 @@
           <a:bodyPr wrap="square" lIns="38100" tIns="38100" rIns="38100" bIns="38100" rtlCol="0" anchor="ctr"/>
           <a:lstStyle/>
           <a:p>
-            <a:pPr marL="0" indent="0" algn="r" rtl="1">
+            <a:pPr rtl="1" algn="r" indent="0" marL="0">
               <a:buNone/>
             </a:pPr>
             <a:r>
               <a:rPr lang="en-US" sz="2100" dirty="0">
                 <a:solidFill>
-                  <a:srgbClr val="FFFFFF"/>
-                </a:solidFill>
+                  <a:srgbClr val="FAF6EE"/>
+                </a:solidFill>
+                <a:latin typeface="Arial" pitchFamily="34" charset="0"/>
                 <a:ea typeface="Arial" pitchFamily="34" charset="-122"/>
                 <a:cs typeface="Arial" pitchFamily="34" charset="-120"/>
               </a:rPr>
@@ -6147,22 +6076,15 @@
             <a:avLst/>
           </a:prstGeom>
           <a:solidFill>
-            <a:srgbClr val="2D9C6B"/>
+            <a:srgbClr val="ECC31C"/>
           </a:solidFill>
           <a:ln w="12700">
             <a:solidFill>
-              <a:srgbClr val="2D9C6B"/>
+              <a:srgbClr val="ECC31C"/>
             </a:solidFill>
             <a:prstDash val="solid"/>
           </a:ln>
         </p:spPr>
-        <p:txBody>
-          <a:bodyPr/>
-          <a:lstStyle/>
-          <a:p>
-            <a:endParaRPr lang="he-IL"/>
-          </a:p>
-        </p:txBody>
       </p:sp>
       <p:sp>
         <p:nvSpPr>
@@ -6185,14 +6107,15 @@
           <a:bodyPr wrap="square" lIns="0" tIns="0" rIns="0" bIns="0" rtlCol="0" anchor="ctr"/>
           <a:lstStyle/>
           <a:p>
-            <a:pPr marL="0" indent="0" algn="ctr" rtl="1">
+            <a:pPr rtl="1" algn="ctr" indent="0" marL="0">
               <a:buNone/>
             </a:pPr>
             <a:r>
               <a:rPr lang="en-US" sz="2000" b="1" dirty="0">
                 <a:solidFill>
-                  <a:srgbClr val="FFFFFF"/>
-                </a:solidFill>
+                  <a:srgbClr val="FAF6EE"/>
+                </a:solidFill>
+                <a:latin typeface="Arial" pitchFamily="34" charset="0"/>
                 <a:ea typeface="Arial" pitchFamily="34" charset="-122"/>
                 <a:cs typeface="Arial" pitchFamily="34" charset="-120"/>
               </a:rPr>
@@ -6223,14 +6146,15 @@
           <a:bodyPr wrap="square" lIns="38100" tIns="38100" rIns="38100" bIns="38100" rtlCol="0" anchor="ctr"/>
           <a:lstStyle/>
           <a:p>
-            <a:pPr marL="0" indent="0" algn="r" rtl="1">
+            <a:pPr rtl="1" algn="r" indent="0" marL="0">
               <a:buNone/>
             </a:pPr>
             <a:r>
               <a:rPr lang="en-US" sz="2100" dirty="0">
                 <a:solidFill>
-                  <a:srgbClr val="FFFFFF"/>
-                </a:solidFill>
+                  <a:srgbClr val="FAF6EE"/>
+                </a:solidFill>
+                <a:latin typeface="Arial" pitchFamily="34" charset="0"/>
                 <a:ea typeface="Arial" pitchFamily="34" charset="-122"/>
                 <a:cs typeface="Arial" pitchFamily="34" charset="-120"/>
               </a:rPr>
@@ -6255,22 +6179,15 @@
             <a:avLst/>
           </a:prstGeom>
           <a:solidFill>
-            <a:srgbClr val="2D9C6B"/>
+            <a:srgbClr val="ECC31C"/>
           </a:solidFill>
           <a:ln w="12700">
             <a:solidFill>
-              <a:srgbClr val="2D9C6B"/>
+              <a:srgbClr val="ECC31C"/>
             </a:solidFill>
             <a:prstDash val="solid"/>
           </a:ln>
         </p:spPr>
-        <p:txBody>
-          <a:bodyPr/>
-          <a:lstStyle/>
-          <a:p>
-            <a:endParaRPr lang="he-IL"/>
-          </a:p>
-        </p:txBody>
       </p:sp>
       <p:sp>
         <p:nvSpPr>
@@ -6293,14 +6210,15 @@
           <a:bodyPr wrap="square" lIns="0" tIns="0" rIns="0" bIns="0" rtlCol="0" anchor="ctr"/>
           <a:lstStyle/>
           <a:p>
-            <a:pPr marL="0" indent="0" algn="ctr" rtl="1">
+            <a:pPr rtl="1" algn="ctr" indent="0" marL="0">
               <a:buNone/>
             </a:pPr>
             <a:r>
               <a:rPr lang="en-US" sz="2000" b="1" dirty="0">
                 <a:solidFill>
-                  <a:srgbClr val="FFFFFF"/>
-                </a:solidFill>
+                  <a:srgbClr val="FAF6EE"/>
+                </a:solidFill>
+                <a:latin typeface="Arial" pitchFamily="34" charset="0"/>
                 <a:ea typeface="Arial" pitchFamily="34" charset="-122"/>
                 <a:cs typeface="Arial" pitchFamily="34" charset="-120"/>
               </a:rPr>
@@ -6331,14 +6249,15 @@
           <a:bodyPr wrap="square" lIns="38100" tIns="38100" rIns="38100" bIns="38100" rtlCol="0" anchor="ctr"/>
           <a:lstStyle/>
           <a:p>
-            <a:pPr marL="0" indent="0" algn="r" rtl="1">
+            <a:pPr rtl="1" algn="r" indent="0" marL="0">
               <a:buNone/>
             </a:pPr>
             <a:r>
               <a:rPr lang="en-US" sz="2100" dirty="0">
                 <a:solidFill>
-                  <a:srgbClr val="FFFFFF"/>
-                </a:solidFill>
+                  <a:srgbClr val="FAF6EE"/>
+                </a:solidFill>
+                <a:latin typeface="Arial" pitchFamily="34" charset="0"/>
                 <a:ea typeface="Arial" pitchFamily="34" charset="-122"/>
                 <a:cs typeface="Arial" pitchFamily="34" charset="-120"/>
               </a:rPr>
@@ -6363,22 +6282,15 @@
             <a:avLst/>
           </a:prstGeom>
           <a:solidFill>
-            <a:srgbClr val="2D9C6B"/>
+            <a:srgbClr val="ECC31C"/>
           </a:solidFill>
           <a:ln w="12700">
             <a:solidFill>
-              <a:srgbClr val="2D9C6B"/>
+              <a:srgbClr val="ECC31C"/>
             </a:solidFill>
             <a:prstDash val="solid"/>
           </a:ln>
         </p:spPr>
-        <p:txBody>
-          <a:bodyPr/>
-          <a:lstStyle/>
-          <a:p>
-            <a:endParaRPr lang="he-IL"/>
-          </a:p>
-        </p:txBody>
       </p:sp>
       <p:sp>
         <p:nvSpPr>
@@ -6401,14 +6313,15 @@
           <a:bodyPr wrap="square" lIns="0" tIns="0" rIns="0" bIns="0" rtlCol="0" anchor="ctr"/>
           <a:lstStyle/>
           <a:p>
-            <a:pPr marL="0" indent="0" algn="ctr" rtl="1">
+            <a:pPr rtl="1" algn="ctr" indent="0" marL="0">
               <a:buNone/>
             </a:pPr>
             <a:r>
               <a:rPr lang="en-US" sz="2000" b="1" dirty="0">
                 <a:solidFill>
-                  <a:srgbClr val="FFFFFF"/>
-                </a:solidFill>
+                  <a:srgbClr val="FAF6EE"/>
+                </a:solidFill>
+                <a:latin typeface="Arial" pitchFamily="34" charset="0"/>
                 <a:ea typeface="Arial" pitchFamily="34" charset="-122"/>
                 <a:cs typeface="Arial" pitchFamily="34" charset="-120"/>
               </a:rPr>
@@ -6439,14 +6352,15 @@
           <a:bodyPr wrap="square" lIns="38100" tIns="38100" rIns="38100" bIns="38100" rtlCol="0" anchor="ctr"/>
           <a:lstStyle/>
           <a:p>
-            <a:pPr marL="0" indent="0" algn="r" rtl="1">
+            <a:pPr rtl="1" algn="r" indent="0" marL="0">
               <a:buNone/>
             </a:pPr>
             <a:r>
               <a:rPr lang="en-US" sz="2100" dirty="0">
                 <a:solidFill>
-                  <a:srgbClr val="FFFFFF"/>
-                </a:solidFill>
+                  <a:srgbClr val="FAF6EE"/>
+                </a:solidFill>
+                <a:latin typeface="Arial" pitchFamily="34" charset="0"/>
                 <a:ea typeface="Arial" pitchFamily="34" charset="-122"/>
                 <a:cs typeface="Arial" pitchFamily="34" charset="-120"/>
               </a:rPr>
@@ -6471,22 +6385,15 @@
             <a:avLst/>
           </a:prstGeom>
           <a:solidFill>
-            <a:srgbClr val="2D9C6B"/>
+            <a:srgbClr val="ECC31C"/>
           </a:solidFill>
           <a:ln w="12700">
             <a:solidFill>
-              <a:srgbClr val="2D9C6B"/>
+              <a:srgbClr val="ECC31C"/>
             </a:solidFill>
             <a:prstDash val="solid"/>
           </a:ln>
         </p:spPr>
-        <p:txBody>
-          <a:bodyPr/>
-          <a:lstStyle/>
-          <a:p>
-            <a:endParaRPr lang="he-IL"/>
-          </a:p>
-        </p:txBody>
       </p:sp>
       <p:sp>
         <p:nvSpPr>
@@ -6509,14 +6416,15 @@
           <a:bodyPr wrap="square" lIns="0" tIns="0" rIns="0" bIns="0" rtlCol="0" anchor="ctr"/>
           <a:lstStyle/>
           <a:p>
-            <a:pPr marL="0" indent="0" algn="ctr" rtl="1">
+            <a:pPr rtl="1" algn="ctr" indent="0" marL="0">
               <a:buNone/>
             </a:pPr>
             <a:r>
               <a:rPr lang="en-US" sz="2000" b="1" dirty="0">
                 <a:solidFill>
-                  <a:srgbClr val="FFFFFF"/>
-                </a:solidFill>
+                  <a:srgbClr val="FAF6EE"/>
+                </a:solidFill>
+                <a:latin typeface="Arial" pitchFamily="34" charset="0"/>
                 <a:ea typeface="Arial" pitchFamily="34" charset="-122"/>
                 <a:cs typeface="Arial" pitchFamily="34" charset="-120"/>
               </a:rPr>
@@ -6547,14 +6455,15 @@
           <a:bodyPr wrap="square" lIns="38100" tIns="38100" rIns="38100" bIns="38100" rtlCol="0" anchor="ctr"/>
           <a:lstStyle/>
           <a:p>
-            <a:pPr marL="0" indent="0" algn="r" rtl="1">
+            <a:pPr rtl="1" algn="r" indent="0" marL="0">
               <a:buNone/>
             </a:pPr>
             <a:r>
               <a:rPr lang="en-US" sz="2100" dirty="0">
                 <a:solidFill>
-                  <a:srgbClr val="FFFFFF"/>
-                </a:solidFill>
+                  <a:srgbClr val="FAF6EE"/>
+                </a:solidFill>
+                <a:latin typeface="Arial" pitchFamily="34" charset="0"/>
                 <a:ea typeface="Arial" pitchFamily="34" charset="-122"/>
                 <a:cs typeface="Arial" pitchFamily="34" charset="-120"/>
               </a:rPr>
@@ -6579,22 +6488,15 @@
             <a:avLst/>
           </a:prstGeom>
           <a:solidFill>
-            <a:srgbClr val="2D9C6B"/>
+            <a:srgbClr val="ECC31C"/>
           </a:solidFill>
           <a:ln w="12700">
             <a:solidFill>
-              <a:srgbClr val="2D9C6B"/>
+              <a:srgbClr val="ECC31C"/>
             </a:solidFill>
             <a:prstDash val="solid"/>
           </a:ln>
         </p:spPr>
-        <p:txBody>
-          <a:bodyPr/>
-          <a:lstStyle/>
-          <a:p>
-            <a:endParaRPr lang="he-IL"/>
-          </a:p>
-        </p:txBody>
       </p:sp>
       <p:sp>
         <p:nvSpPr>
@@ -6617,14 +6519,15 @@
           <a:bodyPr wrap="square" lIns="0" tIns="0" rIns="0" bIns="0" rtlCol="0" anchor="ctr"/>
           <a:lstStyle/>
           <a:p>
-            <a:pPr marL="0" indent="0" algn="ctr" rtl="1">
+            <a:pPr rtl="1" algn="ctr" indent="0" marL="0">
               <a:buNone/>
             </a:pPr>
             <a:r>
               <a:rPr lang="en-US" sz="2000" b="1" dirty="0">
                 <a:solidFill>
-                  <a:srgbClr val="FFFFFF"/>
-                </a:solidFill>
+                  <a:srgbClr val="FAF6EE"/>
+                </a:solidFill>
+                <a:latin typeface="Arial" pitchFamily="34" charset="0"/>
                 <a:ea typeface="Arial" pitchFamily="34" charset="-122"/>
                 <a:cs typeface="Arial" pitchFamily="34" charset="-120"/>
               </a:rPr>
@@ -6655,14 +6558,15 @@
           <a:bodyPr wrap="square" lIns="38100" tIns="38100" rIns="38100" bIns="38100" rtlCol="0" anchor="ctr"/>
           <a:lstStyle/>
           <a:p>
-            <a:pPr marL="0" indent="0" algn="r" rtl="1">
+            <a:pPr rtl="1" algn="r" indent="0" marL="0">
               <a:buNone/>
             </a:pPr>
             <a:r>
               <a:rPr lang="en-US" sz="2100" dirty="0">
                 <a:solidFill>
-                  <a:srgbClr val="FFFFFF"/>
-                </a:solidFill>
+                  <a:srgbClr val="FAF6EE"/>
+                </a:solidFill>
+                <a:latin typeface="Arial" pitchFamily="34" charset="0"/>
                 <a:ea typeface="Arial" pitchFamily="34" charset="-122"/>
                 <a:cs typeface="Arial" pitchFamily="34" charset="-120"/>
               </a:rPr>
@@ -6687,29 +6591,22 @@
             <a:avLst/>
           </a:prstGeom>
           <a:solidFill>
-            <a:srgbClr val="102030"/>
+            <a:srgbClr val="241D16"/>
           </a:solidFill>
           <a:ln w="15240">
             <a:solidFill>
-              <a:srgbClr val="2D9C6B"/>
+              <a:srgbClr val="ECC31C"/>
             </a:solidFill>
             <a:prstDash val="solid"/>
           </a:ln>
           <a:effectLst>
-            <a:outerShdw blurRad="101600" dist="38100" dir="8100000" algn="bl" rotWithShape="0">
+            <a:outerShdw sx="100000" sy="100000" kx="0" ky="0" algn="bl" rotWithShape="0" blurRad="101600" dist="38100" dir="8100000">
               <a:srgbClr val="000000">
                 <a:alpha val="30000"/>
               </a:srgbClr>
             </a:outerShdw>
           </a:effectLst>
         </p:spPr>
-        <p:txBody>
-          <a:bodyPr/>
-          <a:lstStyle/>
-          <a:p>
-            <a:endParaRPr lang="he-IL"/>
-          </a:p>
-        </p:txBody>
       </p:sp>
       <p:sp>
         <p:nvSpPr>
@@ -6732,14 +6629,15 @@
           <a:bodyPr wrap="square" lIns="0" tIns="0" rIns="0" bIns="0" rtlCol="0" anchor="ctr"/>
           <a:lstStyle/>
           <a:p>
-            <a:pPr marL="0" indent="0" algn="r" rtl="1">
+            <a:pPr rtl="1" algn="r" indent="0" marL="0">
               <a:buNone/>
             </a:pPr>
             <a:r>
               <a:rPr lang="en-US" sz="3800" b="1" dirty="0">
                 <a:solidFill>
-                  <a:srgbClr val="52B788"/>
-                </a:solidFill>
+                  <a:srgbClr val="D4A040"/>
+                </a:solidFill>
+                <a:latin typeface="Arial" pitchFamily="34" charset="0"/>
                 <a:ea typeface="Arial" pitchFamily="34" charset="-122"/>
                 <a:cs typeface="Arial" pitchFamily="34" charset="-120"/>
               </a:rPr>
@@ -6770,14 +6668,15 @@
           <a:bodyPr wrap="square" lIns="50800" tIns="50800" rIns="50800" bIns="50800" rtlCol="0" anchor="t"/>
           <a:lstStyle/>
           <a:p>
-            <a:pPr marL="0" indent="0" algn="r" rtl="1">
+            <a:pPr rtl="1" algn="r" indent="0" marL="0">
               <a:buNone/>
             </a:pPr>
             <a:r>
               <a:rPr lang="en-US" sz="2200" dirty="0">
                 <a:solidFill>
-                  <a:srgbClr val="FFFFFF"/>
-                </a:solidFill>
+                  <a:srgbClr val="FAF6EE"/>
+                </a:solidFill>
+                <a:latin typeface="Arial" pitchFamily="34" charset="0"/>
                 <a:ea typeface="Arial" pitchFamily="34" charset="-122"/>
                 <a:cs typeface="Arial" pitchFamily="34" charset="-120"/>
               </a:rPr>
@@ -6808,14 +6707,15 @@
           <a:bodyPr wrap="square" lIns="0" tIns="0" rIns="0" bIns="0" rtlCol="0" anchor="t"/>
           <a:lstStyle/>
           <a:p>
-            <a:pPr marL="0" indent="0" algn="r" rtl="1">
+            <a:pPr rtl="1" algn="r" indent="0" marL="0">
               <a:buNone/>
             </a:pPr>
             <a:r>
               <a:rPr lang="en-US" sz="2500" b="1" dirty="0">
                 <a:solidFill>
-                  <a:srgbClr val="52B788"/>
-                </a:solidFill>
+                  <a:srgbClr val="D4A040"/>
+                </a:solidFill>
+                <a:latin typeface="Arial" pitchFamily="34" charset="0"/>
                 <a:ea typeface="Arial" pitchFamily="34" charset="-122"/>
                 <a:cs typeface="Arial" pitchFamily="34" charset="-120"/>
               </a:rPr>
@@ -6840,22 +6740,15 @@
             <a:avLst/>
           </a:prstGeom>
           <a:solidFill>
-            <a:srgbClr val="2D9C6B"/>
+            <a:srgbClr val="ECC31C"/>
           </a:solidFill>
           <a:ln w="12700">
             <a:solidFill>
-              <a:srgbClr val="2D9C6B"/>
+              <a:srgbClr val="ECC31C"/>
             </a:solidFill>
             <a:prstDash val="solid"/>
           </a:ln>
         </p:spPr>
-        <p:txBody>
-          <a:bodyPr/>
-          <a:lstStyle/>
-          <a:p>
-            <a:endParaRPr lang="he-IL"/>
-          </a:p>
-        </p:txBody>
       </p:sp>
       <p:sp>
         <p:nvSpPr>
@@ -6878,14 +6771,15 @@
           <a:bodyPr wrap="square" lIns="38100" tIns="38100" rIns="38100" bIns="38100" rtlCol="0" anchor="ctr"/>
           <a:lstStyle/>
           <a:p>
-            <a:pPr marL="0" indent="0" algn="r" rtl="1">
+            <a:pPr rtl="1" algn="r" indent="0" marL="0">
               <a:buNone/>
             </a:pPr>
             <a:r>
               <a:rPr lang="en-US" sz="2100" dirty="0">
                 <a:solidFill>
-                  <a:srgbClr val="FFFFFF"/>
-                </a:solidFill>
+                  <a:srgbClr val="FAF6EE"/>
+                </a:solidFill>
+                <a:latin typeface="Arial" pitchFamily="34" charset="0"/>
                 <a:ea typeface="Arial" pitchFamily="34" charset="-122"/>
                 <a:cs typeface="Arial" pitchFamily="34" charset="-120"/>
               </a:rPr>
@@ -6910,22 +6804,15 @@
             <a:avLst/>
           </a:prstGeom>
           <a:solidFill>
-            <a:srgbClr val="2D9C6B"/>
+            <a:srgbClr val="ECC31C"/>
           </a:solidFill>
           <a:ln w="12700">
             <a:solidFill>
-              <a:srgbClr val="2D9C6B"/>
+              <a:srgbClr val="ECC31C"/>
             </a:solidFill>
             <a:prstDash val="solid"/>
           </a:ln>
         </p:spPr>
-        <p:txBody>
-          <a:bodyPr/>
-          <a:lstStyle/>
-          <a:p>
-            <a:endParaRPr lang="he-IL"/>
-          </a:p>
-        </p:txBody>
       </p:sp>
       <p:sp>
         <p:nvSpPr>
@@ -6948,14 +6835,15 @@
           <a:bodyPr wrap="square" lIns="38100" tIns="38100" rIns="38100" bIns="38100" rtlCol="0" anchor="ctr"/>
           <a:lstStyle/>
           <a:p>
-            <a:pPr marL="0" indent="0" algn="r" rtl="1">
+            <a:pPr rtl="1" algn="r" indent="0" marL="0">
               <a:buNone/>
             </a:pPr>
             <a:r>
               <a:rPr lang="en-US" sz="2100" dirty="0">
                 <a:solidFill>
-                  <a:srgbClr val="FFFFFF"/>
-                </a:solidFill>
+                  <a:srgbClr val="FAF6EE"/>
+                </a:solidFill>
+                <a:latin typeface="Arial" pitchFamily="34" charset="0"/>
                 <a:ea typeface="Arial" pitchFamily="34" charset="-122"/>
                 <a:cs typeface="Arial" pitchFamily="34" charset="-120"/>
               </a:rPr>
@@ -6980,22 +6868,15 @@
             <a:avLst/>
           </a:prstGeom>
           <a:solidFill>
-            <a:srgbClr val="2D9C6B"/>
+            <a:srgbClr val="ECC31C"/>
           </a:solidFill>
           <a:ln w="12700">
             <a:solidFill>
-              <a:srgbClr val="2D9C6B"/>
+              <a:srgbClr val="ECC31C"/>
             </a:solidFill>
             <a:prstDash val="solid"/>
           </a:ln>
         </p:spPr>
-        <p:txBody>
-          <a:bodyPr/>
-          <a:lstStyle/>
-          <a:p>
-            <a:endParaRPr lang="he-IL"/>
-          </a:p>
-        </p:txBody>
       </p:sp>
       <p:sp>
         <p:nvSpPr>
@@ -7018,14 +6899,15 @@
           <a:bodyPr wrap="square" lIns="38100" tIns="38100" rIns="38100" bIns="38100" rtlCol="0" anchor="ctr"/>
           <a:lstStyle/>
           <a:p>
-            <a:pPr marL="0" indent="0" algn="r" rtl="1">
+            <a:pPr rtl="1" algn="r" indent="0" marL="0">
               <a:buNone/>
             </a:pPr>
             <a:r>
               <a:rPr lang="en-US" sz="2100" dirty="0">
                 <a:solidFill>
-                  <a:srgbClr val="FFFFFF"/>
-                </a:solidFill>
+                  <a:srgbClr val="FAF6EE"/>
+                </a:solidFill>
+                <a:latin typeface="Arial" pitchFamily="34" charset="0"/>
                 <a:ea typeface="Arial" pitchFamily="34" charset="-122"/>
                 <a:cs typeface="Arial" pitchFamily="34" charset="-120"/>
               </a:rPr>
@@ -7050,22 +6932,15 @@
             <a:avLst/>
           </a:prstGeom>
           <a:solidFill>
-            <a:srgbClr val="2D9C6B"/>
+            <a:srgbClr val="ECC31C"/>
           </a:solidFill>
           <a:ln w="12700">
             <a:solidFill>
-              <a:srgbClr val="2D9C6B"/>
+              <a:srgbClr val="ECC31C"/>
             </a:solidFill>
             <a:prstDash val="solid"/>
           </a:ln>
         </p:spPr>
-        <p:txBody>
-          <a:bodyPr/>
-          <a:lstStyle/>
-          <a:p>
-            <a:endParaRPr lang="he-IL"/>
-          </a:p>
-        </p:txBody>
       </p:sp>
       <p:sp>
         <p:nvSpPr>
@@ -7088,14 +6963,15 @@
           <a:bodyPr wrap="square" lIns="38100" tIns="38100" rIns="38100" bIns="38100" rtlCol="0" anchor="ctr"/>
           <a:lstStyle/>
           <a:p>
-            <a:pPr marL="0" indent="0" algn="r" rtl="1">
+            <a:pPr rtl="1" algn="r" indent="0" marL="0">
               <a:buNone/>
             </a:pPr>
             <a:r>
               <a:rPr lang="en-US" sz="2100" dirty="0">
                 <a:solidFill>
-                  <a:srgbClr val="FFFFFF"/>
-                </a:solidFill>
+                  <a:srgbClr val="FAF6EE"/>
+                </a:solidFill>
+                <a:latin typeface="Arial" pitchFamily="34" charset="0"/>
                 <a:ea typeface="Arial" pitchFamily="34" charset="-122"/>
                 <a:cs typeface="Arial" pitchFamily="34" charset="-120"/>
               </a:rPr>
@@ -7120,22 +6996,15 @@
             <a:avLst/>
           </a:prstGeom>
           <a:solidFill>
-            <a:srgbClr val="061810"/>
+            <a:srgbClr val="100D08"/>
           </a:solidFill>
           <a:ln w="12700">
             <a:solidFill>
-              <a:srgbClr val="061810"/>
+              <a:srgbClr val="100D08"/>
             </a:solidFill>
             <a:prstDash val="solid"/>
           </a:ln>
         </p:spPr>
-        <p:txBody>
-          <a:bodyPr/>
-          <a:lstStyle/>
-          <a:p>
-            <a:endParaRPr lang="he-IL"/>
-          </a:p>
-        </p:txBody>
       </p:sp>
       <p:sp>
         <p:nvSpPr>
@@ -7152,22 +7021,15 @@
             <a:avLst/>
           </a:prstGeom>
           <a:solidFill>
-            <a:srgbClr val="2D9C6B"/>
+            <a:srgbClr val="ECC31C"/>
           </a:solidFill>
           <a:ln w="12700">
             <a:solidFill>
-              <a:srgbClr val="2D9C6B"/>
+              <a:srgbClr val="ECC31C"/>
             </a:solidFill>
             <a:prstDash val="solid"/>
           </a:ln>
         </p:spPr>
-        <p:txBody>
-          <a:bodyPr/>
-          <a:lstStyle/>
-          <a:p>
-            <a:endParaRPr lang="he-IL"/>
-          </a:p>
-        </p:txBody>
       </p:sp>
       <p:sp>
         <p:nvSpPr>
@@ -7190,14 +7052,15 @@
           <a:bodyPr wrap="square" lIns="50800" tIns="50800" rIns="50800" bIns="50800" rtlCol="0" anchor="t"/>
           <a:lstStyle/>
           <a:p>
-            <a:pPr marL="0" indent="0" algn="ctr" rtl="1">
+            <a:pPr rtl="1" algn="ctr" indent="0" marL="0">
               <a:buNone/>
             </a:pPr>
             <a:r>
               <a:rPr lang="en-US" sz="2200" dirty="0">
                 <a:solidFill>
-                  <a:srgbClr val="7FAFC0"/>
-                </a:solidFill>
+                  <a:srgbClr val="9E8E7A"/>
+                </a:solidFill>
+                <a:latin typeface="Arial" pitchFamily="34" charset="0"/>
                 <a:ea typeface="Arial" pitchFamily="34" charset="-122"/>
                 <a:cs typeface="Arial" pitchFamily="34" charset="-120"/>
               </a:rPr>
@@ -7508,319 +7371,4 @@
     </a:ext>
   </a:extLst>
 </a:theme>
-</file>
-
-<file path=ppt/theme/theme2.xml><?xml version="1.0" encoding="utf-8"?>
-<a:theme xmlns:a="http://schemas.openxmlformats.org/drawingml/2006/main" name="ערכת נושא Office">
-  <a:themeElements>
-    <a:clrScheme name="Office">
-      <a:dk1>
-        <a:sysClr val="windowText" lastClr="000000"/>
-      </a:dk1>
-      <a:lt1>
-        <a:sysClr val="window" lastClr="FFFFFF"/>
-      </a:lt1>
-      <a:dk2>
-        <a:srgbClr val="0E2841"/>
-      </a:dk2>
-      <a:lt2>
-        <a:srgbClr val="E8E8E8"/>
-      </a:lt2>
-      <a:accent1>
-        <a:srgbClr val="156082"/>
-      </a:accent1>
-      <a:accent2>
-        <a:srgbClr val="E97132"/>
-      </a:accent2>
-      <a:accent3>
-        <a:srgbClr val="196B24"/>
-      </a:accent3>
-      <a:accent4>
-        <a:srgbClr val="0F9ED5"/>
-      </a:accent4>
-      <a:accent5>
-        <a:srgbClr val="A02B93"/>
-      </a:accent5>
-      <a:accent6>
-        <a:srgbClr val="4EA72E"/>
-      </a:accent6>
-      <a:hlink>
-        <a:srgbClr val="467886"/>
-      </a:hlink>
-      <a:folHlink>
-        <a:srgbClr val="96607D"/>
-      </a:folHlink>
-    </a:clrScheme>
-    <a:fontScheme name="Office">
-      <a:majorFont>
-        <a:latin typeface="Aptos Display" panose="02110004020202020204"/>
-        <a:ea typeface=""/>
-        <a:cs typeface=""/>
-        <a:font script="Jpan" typeface="游ゴシック Light"/>
-        <a:font script="Hang" typeface="맑은 고딕"/>
-        <a:font script="Hans" typeface="等线 Light"/>
-        <a:font script="Hant" typeface="新細明體"/>
-        <a:font script="Arab" typeface="Times New Roman"/>
-        <a:font script="Hebr" typeface="Times New Roman"/>
-        <a:font script="Thai" typeface="Angsana New"/>
-        <a:font script="Ethi" typeface="Nyala"/>
-        <a:font script="Beng" typeface="Vrinda"/>
-        <a:font script="Gujr" typeface="Shruti"/>
-        <a:font script="Khmr" typeface="MoolBoran"/>
-        <a:font script="Knda" typeface="Tunga"/>
-        <a:font script="Guru" typeface="Raavi"/>
-        <a:font script="Cans" typeface="Euphemia"/>
-        <a:font script="Cher" typeface="Plantagenet Cherokee"/>
-        <a:font script="Yiii" typeface="Microsoft Yi Baiti"/>
-        <a:font script="Tibt" typeface="Microsoft Himalaya"/>
-        <a:font script="Thaa" typeface="MV Boli"/>
-        <a:font script="Deva" typeface="Mangal"/>
-        <a:font script="Telu" typeface="Gautami"/>
-        <a:font script="Taml" typeface="Latha"/>
-        <a:font script="Syrc" typeface="Estrangelo Edessa"/>
-        <a:font script="Orya" typeface="Kalinga"/>
-        <a:font script="Mlym" typeface="Kartika"/>
-        <a:font script="Laoo" typeface="DokChampa"/>
-        <a:font script="Sinh" typeface="Iskoola Pota"/>
-        <a:font script="Mong" typeface="Mongolian Baiti"/>
-        <a:font script="Viet" typeface="Times New Roman"/>
-        <a:font script="Uigh" typeface="Microsoft Uighur"/>
-        <a:font script="Geor" typeface="Sylfaen"/>
-        <a:font script="Armn" typeface="Arial"/>
-        <a:font script="Bugi" typeface="Leelawadee UI"/>
-        <a:font script="Bopo" typeface="Microsoft JhengHei"/>
-        <a:font script="Java" typeface="Javanese Text"/>
-        <a:font script="Lisu" typeface="Segoe UI"/>
-        <a:font script="Mymr" typeface="Myanmar Text"/>
-        <a:font script="Nkoo" typeface="Ebrima"/>
-        <a:font script="Olck" typeface="Nirmala UI"/>
-        <a:font script="Osma" typeface="Ebrima"/>
-        <a:font script="Phag" typeface="Phagspa"/>
-        <a:font script="Syrn" typeface="Estrangelo Edessa"/>
-        <a:font script="Syrj" typeface="Estrangelo Edessa"/>
-        <a:font script="Syre" typeface="Estrangelo Edessa"/>
-        <a:font script="Sora" typeface="Nirmala UI"/>
-        <a:font script="Tale" typeface="Microsoft Tai Le"/>
-        <a:font script="Talu" typeface="Microsoft New Tai Lue"/>
-        <a:font script="Tfng" typeface="Ebrima"/>
-      </a:majorFont>
-      <a:minorFont>
-        <a:latin typeface="Aptos" panose="02110004020202020204"/>
-        <a:ea typeface=""/>
-        <a:cs typeface=""/>
-        <a:font script="Jpan" typeface="游ゴシック"/>
-        <a:font script="Hang" typeface="맑은 고딕"/>
-        <a:font script="Hans" typeface="等线"/>
-        <a:font script="Hant" typeface="新細明體"/>
-        <a:font script="Arab" typeface="Arial"/>
-        <a:font script="Hebr" typeface="Arial"/>
-        <a:font script="Thai" typeface="Cordia New"/>
-        <a:font script="Ethi" typeface="Nyala"/>
-        <a:font script="Beng" typeface="Vrinda"/>
-        <a:font script="Gujr" typeface="Shruti"/>
-        <a:font script="Khmr" typeface="DaunPenh"/>
-        <a:font script="Knda" typeface="Tunga"/>
-        <a:font script="Guru" typeface="Raavi"/>
-        <a:font script="Cans" typeface="Euphemia"/>
-        <a:font script="Cher" typeface="Plantagenet Cherokee"/>
-        <a:font script="Yiii" typeface="Microsoft Yi Baiti"/>
-        <a:font script="Tibt" typeface="Microsoft Himalaya"/>
-        <a:font script="Thaa" typeface="MV Boli"/>
-        <a:font script="Deva" typeface="Mangal"/>
-        <a:font script="Telu" typeface="Gautami"/>
-        <a:font script="Taml" typeface="Latha"/>
-        <a:font script="Syrc" typeface="Estrangelo Edessa"/>
-        <a:font script="Orya" typeface="Kalinga"/>
-        <a:font script="Mlym" typeface="Kartika"/>
-        <a:font script="Laoo" typeface="DokChampa"/>
-        <a:font script="Sinh" typeface="Iskoola Pota"/>
-        <a:font script="Mong" typeface="Mongolian Baiti"/>
-        <a:font script="Viet" typeface="Arial"/>
-        <a:font script="Uigh" typeface="Microsoft Uighur"/>
-        <a:font script="Geor" typeface="Sylfaen"/>
-        <a:font script="Armn" typeface="Arial"/>
-        <a:font script="Bugi" typeface="Leelawadee UI"/>
-        <a:font script="Bopo" typeface="Microsoft JhengHei"/>
-        <a:font script="Java" typeface="Javanese Text"/>
-        <a:font script="Lisu" typeface="Segoe UI"/>
-        <a:font script="Mymr" typeface="Myanmar Text"/>
-        <a:font script="Nkoo" typeface="Ebrima"/>
-        <a:font script="Olck" typeface="Nirmala UI"/>
-        <a:font script="Osma" typeface="Ebrima"/>
-        <a:font script="Phag" typeface="Phagspa"/>
-        <a:font script="Syrn" typeface="Estrangelo Edessa"/>
-        <a:font script="Syrj" typeface="Estrangelo Edessa"/>
-        <a:font script="Syre" typeface="Estrangelo Edessa"/>
-        <a:font script="Sora" typeface="Nirmala UI"/>
-        <a:font script="Tale" typeface="Microsoft Tai Le"/>
-        <a:font script="Talu" typeface="Microsoft New Tai Lue"/>
-        <a:font script="Tfng" typeface="Ebrima"/>
-      </a:minorFont>
-    </a:fontScheme>
-    <a:fmtScheme name="Office">
-      <a:fillStyleLst>
-        <a:solidFill>
-          <a:schemeClr val="phClr"/>
-        </a:solidFill>
-        <a:gradFill rotWithShape="1">
-          <a:gsLst>
-            <a:gs pos="0">
-              <a:schemeClr val="phClr">
-                <a:lumMod val="110000"/>
-                <a:satMod val="105000"/>
-                <a:tint val="67000"/>
-              </a:schemeClr>
-            </a:gs>
-            <a:gs pos="50000">
-              <a:schemeClr val="phClr">
-                <a:lumMod val="105000"/>
-                <a:satMod val="103000"/>
-                <a:tint val="73000"/>
-              </a:schemeClr>
-            </a:gs>
-            <a:gs pos="100000">
-              <a:schemeClr val="phClr">
-                <a:lumMod val="105000"/>
-                <a:satMod val="109000"/>
-                <a:tint val="81000"/>
-              </a:schemeClr>
-            </a:gs>
-          </a:gsLst>
-          <a:lin ang="5400000" scaled="0"/>
-        </a:gradFill>
-        <a:gradFill rotWithShape="1">
-          <a:gsLst>
-            <a:gs pos="0">
-              <a:schemeClr val="phClr">
-                <a:satMod val="103000"/>
-                <a:lumMod val="102000"/>
-                <a:tint val="94000"/>
-              </a:schemeClr>
-            </a:gs>
-            <a:gs pos="50000">
-              <a:schemeClr val="phClr">
-                <a:satMod val="110000"/>
-                <a:lumMod val="100000"/>
-                <a:shade val="100000"/>
-              </a:schemeClr>
-            </a:gs>
-            <a:gs pos="100000">
-              <a:schemeClr val="phClr">
-                <a:lumMod val="99000"/>
-                <a:satMod val="120000"/>
-                <a:shade val="78000"/>
-              </a:schemeClr>
-            </a:gs>
-          </a:gsLst>
-          <a:lin ang="5400000" scaled="0"/>
-        </a:gradFill>
-      </a:fillStyleLst>
-      <a:lnStyleLst>
-        <a:ln w="12700" cap="flat" cmpd="sng" algn="ctr">
-          <a:solidFill>
-            <a:schemeClr val="phClr"/>
-          </a:solidFill>
-          <a:prstDash val="solid"/>
-          <a:miter lim="800000"/>
-        </a:ln>
-        <a:ln w="19050" cap="flat" cmpd="sng" algn="ctr">
-          <a:solidFill>
-            <a:schemeClr val="phClr"/>
-          </a:solidFill>
-          <a:prstDash val="solid"/>
-          <a:miter lim="800000"/>
-        </a:ln>
-        <a:ln w="25400" cap="flat" cmpd="sng" algn="ctr">
-          <a:solidFill>
-            <a:schemeClr val="phClr"/>
-          </a:solidFill>
-          <a:prstDash val="solid"/>
-          <a:miter lim="800000"/>
-        </a:ln>
-      </a:lnStyleLst>
-      <a:effectStyleLst>
-        <a:effectStyle>
-          <a:effectLst/>
-        </a:effectStyle>
-        <a:effectStyle>
-          <a:effectLst/>
-        </a:effectStyle>
-        <a:effectStyle>
-          <a:effectLst>
-            <a:outerShdw blurRad="57150" dist="19050" dir="5400000" algn="ctr" rotWithShape="0">
-              <a:srgbClr val="000000">
-                <a:alpha val="63000"/>
-              </a:srgbClr>
-            </a:outerShdw>
-          </a:effectLst>
-        </a:effectStyle>
-      </a:effectStyleLst>
-      <a:bgFillStyleLst>
-        <a:solidFill>
-          <a:schemeClr val="phClr"/>
-        </a:solidFill>
-        <a:solidFill>
-          <a:schemeClr val="phClr">
-            <a:tint val="95000"/>
-            <a:satMod val="170000"/>
-          </a:schemeClr>
-        </a:solidFill>
-        <a:gradFill rotWithShape="1">
-          <a:gsLst>
-            <a:gs pos="0">
-              <a:schemeClr val="phClr">
-                <a:tint val="93000"/>
-                <a:satMod val="150000"/>
-                <a:shade val="98000"/>
-                <a:lumMod val="102000"/>
-              </a:schemeClr>
-            </a:gs>
-            <a:gs pos="50000">
-              <a:schemeClr val="phClr">
-                <a:tint val="98000"/>
-                <a:satMod val="130000"/>
-                <a:shade val="90000"/>
-                <a:lumMod val="103000"/>
-              </a:schemeClr>
-            </a:gs>
-            <a:gs pos="100000">
-              <a:schemeClr val="phClr">
-                <a:shade val="63000"/>
-                <a:satMod val="120000"/>
-              </a:schemeClr>
-            </a:gs>
-          </a:gsLst>
-          <a:lin ang="5400000" scaled="0"/>
-        </a:gradFill>
-      </a:bgFillStyleLst>
-    </a:fmtScheme>
-  </a:themeElements>
-  <a:objectDefaults>
-    <a:lnDef>
-      <a:spPr/>
-      <a:bodyPr/>
-      <a:lstStyle/>
-      <a:style>
-        <a:lnRef idx="2">
-          <a:schemeClr val="accent1"/>
-        </a:lnRef>
-        <a:fillRef idx="0">
-          <a:schemeClr val="accent1"/>
-        </a:fillRef>
-        <a:effectRef idx="1">
-          <a:schemeClr val="accent1"/>
-        </a:effectRef>
-        <a:fontRef idx="minor">
-          <a:schemeClr val="tx1"/>
-        </a:fontRef>
-      </a:style>
-    </a:lnDef>
-  </a:objectDefaults>
-  <a:extraClrSchemeLst/>
-  <a:extLst>
-    <a:ext uri="{05A4C25C-085E-4340-85A3-A5531E510DB2}">
-      <thm15:themeFamily xmlns:thm15="http://schemas.microsoft.com/office/thememl/2012/main" name="Office Theme" id="{2E142A2C-CD16-42D6-873A-C26D2A0506FA}" vid="{1BDDFF52-6CD6-40A5-AB3C-68EB2F1E4D0A}"/>
-    </a:ext>
-  </a:extLst>
-</a:theme>
 </file>